--- a/FlyBot – Product overview (link).pptx
+++ b/FlyBot – Product overview (link).pptx
@@ -1133,7 +1133,7 @@
           <a:p>
             <a:r>
               <a:rPr lang="en-US" dirty="0"/>
-              <a:t>Three steps: mount an EZVIZ camera on the trap, add it with its serial number and verification code and choose the trap kind, then set the alert threshold and channels. Contact contact@agrhub.com or visit https://ezviz.agrhub.com.</a:t>
+              <a:t>Three steps: mount an EZVIZ camera on the trap, add it with its serial number and verification code and choose the trap kind, then set the alert threshold and channels. Contact contact@agrhub.com or visit https://ezviz.agrhub.com. The two QR codes open the app and the product tour on a phone.</a:t>
             </a:r>
             <a:endParaRPr lang="en-US" dirty="0"/>
           </a:p>
@@ -1573,7 +1573,7 @@
           <a:p>
             <a:r>
               <a:rPr lang="en-US" dirty="0"/>
-              <a:t>The AI boxes each insect in the photo with its species and confidence. Users can confirm or correct the count; reviewed photos are used to retrain the AI. Photos the AI failed on are retried automatically.</a:t>
+              <a:t>The AI boxes each insect in the photo with its species and confidence. Users can confirm or correct the count; reviewed photos are used to retrain the AI. Photos the AI failed on are retried automatically. The RF-DETR model was trained on 1,573 photos with over 85,000 marked flies; on 76 test photos its recall is 92%, precision 93%, mAP@50 96%.</a:t>
             </a:r>
             <a:endParaRPr lang="en-US" dirty="0"/>
           </a:p>
@@ -1964,9 +1964,9 @@
                 <a:solidFill>
                   <a:srgbClr val="13261D"/>
                 </a:solidFill>
-                <a:latin typeface="Be Vietnam Pro" pitchFamily="34" charset="0"/>
-                <a:ea typeface="Be Vietnam Pro" pitchFamily="34" charset="-122"/>
-                <a:cs typeface="Be Vietnam Pro" pitchFamily="34" charset="-120"/>
+                <a:latin typeface="Arial" pitchFamily="34" charset="0"/>
+                <a:ea typeface="Arial" pitchFamily="34" charset="-122"/>
+                <a:cs typeface="Arial" pitchFamily="34" charset="-120"/>
               </a:defRPr>
             </a:lvl1pPr>
           </a:lstStyle>
@@ -2012,9 +2012,9 @@
                 <a:solidFill>
                   <a:srgbClr val="13261D"/>
                 </a:solidFill>
-                <a:latin typeface="Be Vietnam Pro" pitchFamily="34" charset="0"/>
-                <a:ea typeface="Be Vietnam Pro" pitchFamily="34" charset="-122"/>
-                <a:cs typeface="Be Vietnam Pro" pitchFamily="34" charset="-120"/>
+                <a:latin typeface="Arial" pitchFamily="34" charset="0"/>
+                <a:ea typeface="Arial" pitchFamily="34" charset="-122"/>
+                <a:cs typeface="Arial" pitchFamily="34" charset="-120"/>
               </a:defRPr>
             </a:lvl1pPr>
           </a:lstStyle>
@@ -2092,9 +2092,9 @@
                 <a:solidFill>
                   <a:srgbClr val="13261D"/>
                 </a:solidFill>
-                <a:latin typeface="Be Vietnam Pro" pitchFamily="34" charset="0"/>
-                <a:ea typeface="Be Vietnam Pro" pitchFamily="34" charset="-122"/>
-                <a:cs typeface="Be Vietnam Pro" pitchFamily="34" charset="-120"/>
+                <a:latin typeface="Arial" pitchFamily="34" charset="0"/>
+                <a:ea typeface="Arial" pitchFamily="34" charset="-122"/>
+                <a:cs typeface="Arial" pitchFamily="34" charset="-120"/>
               </a:defRPr>
             </a:lvl1pPr>
           </a:lstStyle>
@@ -2140,9 +2140,9 @@
                 <a:solidFill>
                   <a:srgbClr val="13261D"/>
                 </a:solidFill>
-                <a:latin typeface="Be Vietnam Pro" pitchFamily="34" charset="0"/>
-                <a:ea typeface="Be Vietnam Pro" pitchFamily="34" charset="-122"/>
-                <a:cs typeface="Be Vietnam Pro" pitchFamily="34" charset="-120"/>
+                <a:latin typeface="Arial" pitchFamily="34" charset="0"/>
+                <a:ea typeface="Arial" pitchFamily="34" charset="-122"/>
+                <a:cs typeface="Arial" pitchFamily="34" charset="-120"/>
               </a:defRPr>
             </a:lvl1pPr>
           </a:lstStyle>
@@ -2499,9 +2499,9 @@
                 <a:solidFill>
                   <a:srgbClr val="F5F7F1"/>
                 </a:solidFill>
-                <a:latin typeface="Be Vietnam Pro" pitchFamily="34" charset="0"/>
-                <a:ea typeface="Be Vietnam Pro" pitchFamily="34" charset="-122"/>
-                <a:cs typeface="Be Vietnam Pro" pitchFamily="34" charset="-120"/>
+                <a:latin typeface="Arial" pitchFamily="34" charset="0"/>
+                <a:ea typeface="Arial" pitchFamily="34" charset="-122"/>
+                <a:cs typeface="Arial" pitchFamily="34" charset="-120"/>
               </a:rPr>
               <a:t>FlyBot</a:t>
             </a:r>
@@ -2545,9 +2545,9 @@
                 <a:solidFill>
                   <a:srgbClr val="F5F7F1"/>
                 </a:solidFill>
-                <a:latin typeface="Be Vietnam Pro" pitchFamily="34" charset="0"/>
-                <a:ea typeface="Be Vietnam Pro" pitchFamily="34" charset="-122"/>
-                <a:cs typeface="Be Vietnam Pro" pitchFamily="34" charset="-120"/>
+                <a:latin typeface="Arial" pitchFamily="34" charset="0"/>
+                <a:ea typeface="Arial" pitchFamily="34" charset="-122"/>
+                <a:cs typeface="Arial" pitchFamily="34" charset="-120"/>
               </a:rPr>
               <a:t>Smart insect traps: the camera shoots, the AI counts</a:t>
             </a:r>
@@ -2589,9 +2589,9 @@
                 <a:solidFill>
                   <a:srgbClr val="BFD3C6"/>
                 </a:solidFill>
-                <a:latin typeface="Be Vietnam Pro" pitchFamily="34" charset="0"/>
-                <a:ea typeface="Be Vietnam Pro" pitchFamily="34" charset="-122"/>
-                <a:cs typeface="Be Vietnam Pro" pitchFamily="34" charset="-120"/>
+                <a:latin typeface="Arial" pitchFamily="34" charset="0"/>
+                <a:ea typeface="Arial" pitchFamily="34" charset="-122"/>
+                <a:cs typeface="Arial" pitchFamily="34" charset="-120"/>
               </a:rPr>
               <a:t>Follow fruit flies and other pests on every trap, every day, right on your phone.</a:t>
             </a:r>
@@ -2637,9 +2637,9 @@
                 <a:solidFill>
                   <a:srgbClr val="13261D"/>
                 </a:solidFill>
-                <a:latin typeface="Be Vietnam Pro" pitchFamily="34" charset="0"/>
-                <a:ea typeface="Be Vietnam Pro" pitchFamily="34" charset="-122"/>
-                <a:cs typeface="Be Vietnam Pro" pitchFamily="34" charset="-120"/>
+                <a:latin typeface="Arial" pitchFamily="34" charset="0"/>
+                <a:ea typeface="Arial" pitchFamily="34" charset="-122"/>
+                <a:cs typeface="Arial" pitchFamily="34" charset="-120"/>
               </a:rPr>
               <a:t>Web · Phone · English and Vietnamese</a:t>
             </a:r>
@@ -2681,9 +2681,9 @@
                 <a:solidFill>
                   <a:srgbClr val="F2C230"/>
                 </a:solidFill>
-                <a:latin typeface="Be Vietnam Pro" pitchFamily="34" charset="0"/>
-                <a:ea typeface="Be Vietnam Pro" pitchFamily="34" charset="-122"/>
-                <a:cs typeface="Be Vietnam Pro" pitchFamily="34" charset="-120"/>
+                <a:latin typeface="Arial" pitchFamily="34" charset="0"/>
+                <a:ea typeface="Arial" pitchFamily="34" charset="-122"/>
+                <a:cs typeface="Arial" pitchFamily="34" charset="-120"/>
                 <a:hlinkClick r:id="rId2" invalidUrl="" action="" tgtFrame="" tooltip="" history="1" highlightClick="0" endSnd="0">
                   <a:extLst>
                     <a:ext uri="{A12FA001-AC4F-418D-AE19-62706E023703}">
@@ -2821,9 +2821,9 @@
                 <a:solidFill>
                   <a:srgbClr val="1D7A50"/>
                 </a:solidFill>
-                <a:latin typeface="Be Vietnam Pro" pitchFamily="34" charset="0"/>
-                <a:ea typeface="Be Vietnam Pro" pitchFamily="34" charset="-122"/>
-                <a:cs typeface="Be Vietnam Pro" pitchFamily="34" charset="-120"/>
+                <a:latin typeface="Arial" pitchFamily="34" charset="0"/>
+                <a:ea typeface="Arial" pitchFamily="34" charset="-122"/>
+                <a:cs typeface="Arial" pitchFamily="34" charset="-120"/>
               </a:rPr>
               <a:t>ANALYTICS AND HISTORY</a:t>
             </a:r>
@@ -2867,9 +2867,9 @@
                 <a:solidFill>
                   <a:srgbClr val="13261D"/>
                 </a:solidFill>
-                <a:latin typeface="Be Vietnam Pro" pitchFamily="34" charset="0"/>
-                <a:ea typeface="Be Vietnam Pro" pitchFamily="34" charset="-122"/>
-                <a:cs typeface="Be Vietnam Pro" pitchFamily="34" charset="-120"/>
+                <a:latin typeface="Arial" pitchFamily="34" charset="0"/>
+                <a:ea typeface="Arial" pitchFamily="34" charset="-122"/>
+                <a:cs typeface="Arial" pitchFamily="34" charset="-120"/>
               </a:rPr>
               <a:t>Every photo, filtered and exported</a:t>
             </a:r>
@@ -2990,9 +2990,9 @@
                 <a:solidFill>
                   <a:srgbClr val="13261D"/>
                 </a:solidFill>
-                <a:latin typeface="Be Vietnam Pro" pitchFamily="34" charset="0"/>
-                <a:ea typeface="Be Vietnam Pro" pitchFamily="34" charset="-122"/>
-                <a:cs typeface="Be Vietnam Pro" pitchFamily="34" charset="-120"/>
+                <a:latin typeface="Arial" pitchFamily="34" charset="0"/>
+                <a:ea typeface="Arial" pitchFamily="34" charset="-122"/>
+                <a:cs typeface="Arial" pitchFamily="34" charset="-120"/>
               </a:rPr>
               <a:t>In-depth analysis</a:t>
             </a:r>
@@ -3034,9 +3034,9 @@
                 <a:solidFill>
                   <a:srgbClr val="4A5A50"/>
                 </a:solidFill>
-                <a:latin typeface="Be Vietnam Pro" pitchFamily="34" charset="0"/>
-                <a:ea typeface="Be Vietnam Pro" pitchFamily="34" charset="-122"/>
-                <a:cs typeface="Be Vietnam Pro" pitchFamily="34" charset="-120"/>
+                <a:latin typeface="Arial" pitchFamily="34" charset="0"/>
+                <a:ea typeface="Arial" pitchFamily="34" charset="-122"/>
+                <a:cs typeface="Arial" pitchFamily="34" charset="-120"/>
               </a:rPr>
               <a:t>Compare traps, temperature against catches, the busiest hours.</a:t>
             </a:r>
@@ -3078,9 +3078,9 @@
                 <a:solidFill>
                   <a:srgbClr val="13261D"/>
                 </a:solidFill>
-                <a:latin typeface="Be Vietnam Pro" pitchFamily="34" charset="0"/>
-                <a:ea typeface="Be Vietnam Pro" pitchFamily="34" charset="-122"/>
-                <a:cs typeface="Be Vietnam Pro" pitchFamily="34" charset="-120"/>
+                <a:latin typeface="Arial" pitchFamily="34" charset="0"/>
+                <a:ea typeface="Arial" pitchFamily="34" charset="-122"/>
+                <a:cs typeface="Arial" pitchFamily="34" charset="-120"/>
               </a:rPr>
               <a:t>Filters that fit</a:t>
             </a:r>
@@ -3122,9 +3122,9 @@
                 <a:solidFill>
                   <a:srgbClr val="4A5A50"/>
                 </a:solidFill>
-                <a:latin typeface="Be Vietnam Pro" pitchFamily="34" charset="0"/>
-                <a:ea typeface="Be Vietnam Pro" pitchFamily="34" charset="-122"/>
-                <a:cs typeface="Be Vietnam Pro" pitchFamily="34" charset="-120"/>
+                <a:latin typeface="Arial" pitchFamily="34" charset="0"/>
+                <a:ea typeface="Arial" pitchFamily="34" charset="-122"/>
+                <a:cs typeface="Arial" pitchFamily="34" charset="-120"/>
               </a:rPr>
               <a:t>By camera, period, alert level and review status.</a:t>
             </a:r>
@@ -3166,9 +3166,9 @@
                 <a:solidFill>
                   <a:srgbClr val="13261D"/>
                 </a:solidFill>
-                <a:latin typeface="Be Vietnam Pro" pitchFamily="34" charset="0"/>
-                <a:ea typeface="Be Vietnam Pro" pitchFamily="34" charset="-122"/>
-                <a:cs typeface="Be Vietnam Pro" pitchFamily="34" charset="-120"/>
+                <a:latin typeface="Arial" pitchFamily="34" charset="0"/>
+                <a:ea typeface="Arial" pitchFamily="34" charset="-122"/>
+                <a:cs typeface="Arial" pitchFamily="34" charset="-120"/>
               </a:rPr>
               <a:t>Export with photos</a:t>
             </a:r>
@@ -3210,9 +3210,9 @@
                 <a:solidFill>
                   <a:srgbClr val="4A5A50"/>
                 </a:solidFill>
-                <a:latin typeface="Be Vietnam Pro" pitchFamily="34" charset="0"/>
-                <a:ea typeface="Be Vietnam Pro" pitchFamily="34" charset="-122"/>
-                <a:cs typeface="Be Vietnam Pro" pitchFamily="34" charset="-120"/>
+                <a:latin typeface="Arial" pitchFamily="34" charset="0"/>
+                <a:ea typeface="Arial" pitchFamily="34" charset="-122"/>
+                <a:cs typeface="Arial" pitchFamily="34" charset="-120"/>
               </a:rPr>
               <a:t>PDF and Excel with boxed photos, one sheet per camera.</a:t>
             </a:r>
@@ -3254,9 +3254,9 @@
                 <a:solidFill>
                   <a:srgbClr val="6B7B70"/>
                 </a:solidFill>
-                <a:latin typeface="Be Vietnam Pro" pitchFamily="34" charset="0"/>
-                <a:ea typeface="Be Vietnam Pro" pitchFamily="34" charset="-122"/>
-                <a:cs typeface="Be Vietnam Pro" pitchFamily="34" charset="-120"/>
+                <a:latin typeface="Arial" pitchFamily="34" charset="0"/>
+                <a:ea typeface="Arial" pitchFamily="34" charset="-122"/>
+                <a:cs typeface="Arial" pitchFamily="34" charset="-120"/>
               </a:rPr>
               <a:t>FlyBot · 10</a:t>
             </a:r>
@@ -3330,9 +3330,9 @@
                 <a:solidFill>
                   <a:srgbClr val="1D7A50"/>
                 </a:solidFill>
-                <a:latin typeface="Be Vietnam Pro" pitchFamily="34" charset="0"/>
-                <a:ea typeface="Be Vietnam Pro" pitchFamily="34" charset="-122"/>
-                <a:cs typeface="Be Vietnam Pro" pitchFamily="34" charset="-120"/>
+                <a:latin typeface="Arial" pitchFamily="34" charset="0"/>
+                <a:ea typeface="Arial" pitchFamily="34" charset="-122"/>
+                <a:cs typeface="Arial" pitchFamily="34" charset="-120"/>
               </a:rPr>
               <a:t>REPORTS</a:t>
             </a:r>
@@ -3376,9 +3376,9 @@
                 <a:solidFill>
                   <a:srgbClr val="13261D"/>
                 </a:solidFill>
-                <a:latin typeface="Be Vietnam Pro" pitchFamily="34" charset="0"/>
-                <a:ea typeface="Be Vietnam Pro" pitchFamily="34" charset="-122"/>
-                <a:cs typeface="Be Vietnam Pro" pitchFamily="34" charset="-120"/>
+                <a:latin typeface="Arial" pitchFamily="34" charset="0"/>
+                <a:ea typeface="Arial" pitchFamily="34" charset="-122"/>
+                <a:cs typeface="Arial" pitchFamily="34" charset="-120"/>
               </a:rPr>
               <a:t>Reports that build and send themselves</a:t>
             </a:r>
@@ -3499,9 +3499,9 @@
                 <a:solidFill>
                   <a:srgbClr val="13261D"/>
                 </a:solidFill>
-                <a:latin typeface="Be Vietnam Pro" pitchFamily="34" charset="0"/>
-                <a:ea typeface="Be Vietnam Pro" pitchFamily="34" charset="-122"/>
-                <a:cs typeface="Be Vietnam Pro" pitchFamily="34" charset="-120"/>
+                <a:latin typeface="Arial" pitchFamily="34" charset="0"/>
+                <a:ea typeface="Arial" pitchFamily="34" charset="-122"/>
+                <a:cs typeface="Arial" pitchFamily="34" charset="-120"/>
               </a:rPr>
               <a:t>Pick the blocks</a:t>
             </a:r>
@@ -3543,9 +3543,9 @@
                 <a:solidFill>
                   <a:srgbClr val="4A5A50"/>
                 </a:solidFill>
-                <a:latin typeface="Be Vietnam Pro" pitchFamily="34" charset="0"/>
-                <a:ea typeface="Be Vietnam Pro" pitchFamily="34" charset="-122"/>
-                <a:cs typeface="Be Vietnam Pro" pitchFamily="34" charset="-120"/>
+                <a:latin typeface="Arial" pitchFamily="34" charset="0"/>
+                <a:ea typeface="Arial" pitchFamily="34" charset="-122"/>
+                <a:cs typeface="Arial" pitchFamily="34" charset="-120"/>
               </a:rPr>
               <a:t>Figures, charts, tables; 7 days to 12 months, against the period before.</a:t>
             </a:r>
@@ -3587,9 +3587,9 @@
                 <a:solidFill>
                   <a:srgbClr val="13261D"/>
                 </a:solidFill>
-                <a:latin typeface="Be Vietnam Pro" pitchFamily="34" charset="0"/>
-                <a:ea typeface="Be Vietnam Pro" pitchFamily="34" charset="-122"/>
-                <a:cs typeface="Be Vietnam Pro" pitchFamily="34" charset="-120"/>
+                <a:latin typeface="Arial" pitchFamily="34" charset="0"/>
+                <a:ea typeface="Arial" pitchFamily="34" charset="-122"/>
+                <a:cs typeface="Arial" pitchFamily="34" charset="-120"/>
               </a:rPr>
               <a:t>On a schedule</a:t>
             </a:r>
@@ -3631,9 +3631,9 @@
                 <a:solidFill>
                   <a:srgbClr val="4A5A50"/>
                 </a:solidFill>
-                <a:latin typeface="Be Vietnam Pro" pitchFamily="34" charset="0"/>
-                <a:ea typeface="Be Vietnam Pro" pitchFamily="34" charset="-122"/>
-                <a:cs typeface="Be Vietnam Pro" pitchFamily="34" charset="-120"/>
+                <a:latin typeface="Arial" pitchFamily="34" charset="0"/>
+                <a:ea typeface="Arial" pitchFamily="34" charset="-122"/>
+                <a:cs typeface="Arial" pitchFamily="34" charset="-120"/>
               </a:rPr>
               <a:t>Weekly or monthly, with the PDF, by email and Telegram.</a:t>
             </a:r>
@@ -3675,9 +3675,9 @@
                 <a:solidFill>
                   <a:srgbClr val="13261D"/>
                 </a:solidFill>
-                <a:latin typeface="Be Vietnam Pro" pitchFamily="34" charset="0"/>
-                <a:ea typeface="Be Vietnam Pro" pitchFamily="34" charset="-122"/>
-                <a:cs typeface="Be Vietnam Pro" pitchFamily="34" charset="-120"/>
+                <a:latin typeface="Arial" pitchFamily="34" charset="0"/>
+                <a:ea typeface="Arial" pitchFamily="34" charset="-122"/>
+                <a:cs typeface="Arial" pitchFamily="34" charset="-120"/>
               </a:rPr>
               <a:t>Sharing that ends</a:t>
             </a:r>
@@ -3719,9 +3719,9 @@
                 <a:solidFill>
                   <a:srgbClr val="4A5A50"/>
                 </a:solidFill>
-                <a:latin typeface="Be Vietnam Pro" pitchFamily="34" charset="0"/>
-                <a:ea typeface="Be Vietnam Pro" pitchFamily="34" charset="-122"/>
-                <a:cs typeface="Be Vietnam Pro" pitchFamily="34" charset="-120"/>
+                <a:latin typeface="Arial" pitchFamily="34" charset="0"/>
+                <a:ea typeface="Arial" pitchFamily="34" charset="-122"/>
+                <a:cs typeface="Arial" pitchFamily="34" charset="-120"/>
               </a:rPr>
               <a:t>Share with colleagues or a public link that expires.</a:t>
             </a:r>
@@ -3763,9 +3763,9 @@
                 <a:solidFill>
                   <a:srgbClr val="6B7B70"/>
                 </a:solidFill>
-                <a:latin typeface="Be Vietnam Pro" pitchFamily="34" charset="0"/>
-                <a:ea typeface="Be Vietnam Pro" pitchFamily="34" charset="-122"/>
-                <a:cs typeface="Be Vietnam Pro" pitchFamily="34" charset="-120"/>
+                <a:latin typeface="Arial" pitchFamily="34" charset="0"/>
+                <a:ea typeface="Arial" pitchFamily="34" charset="-122"/>
+                <a:cs typeface="Arial" pitchFamily="34" charset="-120"/>
               </a:rPr>
               <a:t>FlyBot · 11</a:t>
             </a:r>
@@ -3839,9 +3839,9 @@
                 <a:solidFill>
                   <a:srgbClr val="F2C230"/>
                 </a:solidFill>
-                <a:latin typeface="Be Vietnam Pro" pitchFamily="34" charset="0"/>
-                <a:ea typeface="Be Vietnam Pro" pitchFamily="34" charset="-122"/>
-                <a:cs typeface="Be Vietnam Pro" pitchFamily="34" charset="-120"/>
+                <a:latin typeface="Arial" pitchFamily="34" charset="0"/>
+                <a:ea typeface="Arial" pitchFamily="34" charset="-122"/>
+                <a:cs typeface="Arial" pitchFamily="34" charset="-120"/>
               </a:rPr>
               <a:t>AI ASSISTANT</a:t>
             </a:r>
@@ -3885,9 +3885,9 @@
                 <a:solidFill>
                   <a:srgbClr val="F5F7F1"/>
                 </a:solidFill>
-                <a:latin typeface="Be Vietnam Pro" pitchFamily="34" charset="0"/>
-                <a:ea typeface="Be Vietnam Pro" pitchFamily="34" charset="-122"/>
-                <a:cs typeface="Be Vietnam Pro" pitchFamily="34" charset="-120"/>
+                <a:latin typeface="Arial" pitchFamily="34" charset="0"/>
+                <a:ea typeface="Arial" pitchFamily="34" charset="-122"/>
+                <a:cs typeface="Arial" pitchFamily="34" charset="-120"/>
               </a:rPr>
               <a:t>Ask in plain words; it looks up and acts</a:t>
             </a:r>
@@ -3979,9 +3979,9 @@
                 <a:solidFill>
                   <a:srgbClr val="F5F7F1"/>
                 </a:solidFill>
-                <a:latin typeface="Be Vietnam Pro" pitchFamily="34" charset="0"/>
-                <a:ea typeface="Be Vietnam Pro" pitchFamily="34" charset="-122"/>
-                <a:cs typeface="Be Vietnam Pro" pitchFamily="34" charset="-120"/>
+                <a:latin typeface="Arial" pitchFamily="34" charset="0"/>
+                <a:ea typeface="Arial" pitchFamily="34" charset="-122"/>
+                <a:cs typeface="Arial" pitchFamily="34" charset="-120"/>
               </a:rPr>
               <a:t>You ask</a:t>
             </a:r>
@@ -4023,9 +4023,9 @@
                 <a:solidFill>
                   <a:srgbClr val="BFD3C6"/>
                 </a:solidFill>
-                <a:latin typeface="Be Vietnam Pro" pitchFamily="34" charset="0"/>
-                <a:ea typeface="Be Vietnam Pro" pitchFamily="34" charset="-122"/>
-                <a:cs typeface="Be Vietnam Pro" pitchFamily="34" charset="-120"/>
+                <a:latin typeface="Arial" pitchFamily="34" charset="0"/>
+                <a:ea typeface="Arial" pitchFamily="34" charset="-122"/>
+                <a:cs typeface="Arial" pitchFamily="34" charset="-120"/>
               </a:rPr>
               <a:t>"Which trap is worst?"</a:t>
             </a:r>
@@ -4043,9 +4043,9 @@
                 <a:solidFill>
                   <a:srgbClr val="BFD3C6"/>
                 </a:solidFill>
-                <a:latin typeface="Be Vietnam Pro" pitchFamily="34" charset="0"/>
-                <a:ea typeface="Be Vietnam Pro" pitchFamily="34" charset="-122"/>
-                <a:cs typeface="Be Vietnam Pro" pitchFamily="34" charset="-120"/>
+                <a:latin typeface="Arial" pitchFamily="34" charset="0"/>
+                <a:ea typeface="Arial" pitchFamily="34" charset="-122"/>
+                <a:cs typeface="Arial" pitchFamily="34" charset="-120"/>
               </a:rPr>
               <a:t>"Did last week's spray work?"</a:t>
             </a:r>
@@ -4063,9 +4063,9 @@
                 <a:solidFill>
                   <a:srgbClr val="BFD3C6"/>
                 </a:solidFill>
-                <a:latin typeface="Be Vietnam Pro" pitchFamily="34" charset="0"/>
-                <a:ea typeface="Be Vietnam Pro" pitchFamily="34" charset="-122"/>
-                <a:cs typeface="Be Vietnam Pro" pitchFamily="34" charset="-120"/>
+                <a:latin typeface="Arial" pitchFamily="34" charset="0"/>
+                <a:ea typeface="Arial" pitchFamily="34" charset="-122"/>
+                <a:cs typeface="Arial" pitchFamily="34" charset="-120"/>
               </a:rPr>
               <a:t>"I replaced the card on trap A1."</a:t>
             </a:r>
@@ -4180,9 +4180,9 @@
                 <a:solidFill>
                   <a:srgbClr val="F5F7F1"/>
                 </a:solidFill>
-                <a:latin typeface="Be Vietnam Pro" pitchFamily="34" charset="0"/>
-                <a:ea typeface="Be Vietnam Pro" pitchFamily="34" charset="-122"/>
-                <a:cs typeface="Be Vietnam Pro" pitchFamily="34" charset="-120"/>
+                <a:latin typeface="Arial" pitchFamily="34" charset="0"/>
+                <a:ea typeface="Arial" pitchFamily="34" charset="-122"/>
+                <a:cs typeface="Arial" pitchFamily="34" charset="-120"/>
               </a:rPr>
               <a:t>It picks its tools</a:t>
             </a:r>
@@ -4224,9 +4224,9 @@
                 <a:solidFill>
                   <a:srgbClr val="BFD3C6"/>
                 </a:solidFill>
-                <a:latin typeface="Be Vietnam Pro" pitchFamily="34" charset="0"/>
-                <a:ea typeface="Be Vietnam Pro" pitchFamily="34" charset="-122"/>
-                <a:cs typeface="Be Vietnam Pro" pitchFamily="34" charset="-120"/>
+                <a:latin typeface="Arial" pitchFamily="34" charset="0"/>
+                <a:ea typeface="Arial" pitchFamily="34" charset="-122"/>
+                <a:cs typeface="Arial" pitchFamily="34" charset="-120"/>
               </a:rPr>
               <a:t>Trap figures, week-on-week, alerts, reports, logbook; looks at a photo; takes a photo, emails a report.</a:t>
             </a:r>
@@ -4336,9 +4336,9 @@
                 <a:solidFill>
                   <a:srgbClr val="13261D"/>
                 </a:solidFill>
-                <a:latin typeface="Be Vietnam Pro" pitchFamily="34" charset="0"/>
-                <a:ea typeface="Be Vietnam Pro" pitchFamily="34" charset="-122"/>
-                <a:cs typeface="Be Vietnam Pro" pitchFamily="34" charset="-120"/>
+                <a:latin typeface="Arial" pitchFamily="34" charset="0"/>
+                <a:ea typeface="Arial" pitchFamily="34" charset="-122"/>
+                <a:cs typeface="Arial" pitchFamily="34" charset="-120"/>
               </a:rPr>
               <a:t>Answers and guides</a:t>
             </a:r>
@@ -4380,9 +4380,9 @@
                 <a:solidFill>
                   <a:srgbClr val="4A5A50"/>
                 </a:solidFill>
-                <a:latin typeface="Be Vietnam Pro" pitchFamily="34" charset="0"/>
-                <a:ea typeface="Be Vietnam Pro" pitchFamily="34" charset="-122"/>
-                <a:cs typeface="Be Vietnam Pro" pitchFamily="34" charset="-120"/>
+                <a:latin typeface="Arial" pitchFamily="34" charset="0"/>
+                <a:ea typeface="Arial" pitchFamily="34" charset="-122"/>
+                <a:cs typeface="Arial" pitchFamily="34" charset="-120"/>
               </a:rPr>
               <a:t>Streams its answer with photos and charts, opens the right screen. Changes are saved only on your Confirm.</a:t>
             </a:r>
@@ -4424,9 +4424,9 @@
                 <a:solidFill>
                   <a:srgbClr val="BFD3C6"/>
                 </a:solidFill>
-                <a:latin typeface="Be Vietnam Pro" pitchFamily="34" charset="0"/>
-                <a:ea typeface="Be Vietnam Pro" pitchFamily="34" charset="-122"/>
-                <a:cs typeface="Be Vietnam Pro" pitchFamily="34" charset="-120"/>
+                <a:latin typeface="Arial" pitchFamily="34" charset="0"/>
+                <a:ea typeface="Arial" pitchFamily="34" charset="-122"/>
+                <a:cs typeface="Arial" pitchFamily="34" charset="-120"/>
               </a:rPr>
               <a:t>The assistant only sees the cameras you may see, and never changes settings or accounts.</a:t>
             </a:r>
@@ -4468,9 +4468,9 @@
                 <a:solidFill>
                   <a:srgbClr val="8FA898"/>
                 </a:solidFill>
-                <a:latin typeface="Be Vietnam Pro" pitchFamily="34" charset="0"/>
-                <a:ea typeface="Be Vietnam Pro" pitchFamily="34" charset="-122"/>
-                <a:cs typeface="Be Vietnam Pro" pitchFamily="34" charset="-120"/>
+                <a:latin typeface="Arial" pitchFamily="34" charset="0"/>
+                <a:ea typeface="Arial" pitchFamily="34" charset="-122"/>
+                <a:cs typeface="Arial" pitchFamily="34" charset="-120"/>
               </a:rPr>
               <a:t>FlyBot · 12 · Full guide: </a:t>
             </a:r>
@@ -4479,9 +4479,9 @@
                 <a:solidFill>
                   <a:srgbClr val="8FA898"/>
                 </a:solidFill>
-                <a:latin typeface="Be Vietnam Pro" pitchFamily="34" charset="0"/>
-                <a:ea typeface="Be Vietnam Pro" pitchFamily="34" charset="-122"/>
-                <a:cs typeface="Be Vietnam Pro" pitchFamily="34" charset="-120"/>
+                <a:latin typeface="Arial" pitchFamily="34" charset="0"/>
+                <a:ea typeface="Arial" pitchFamily="34" charset="-122"/>
+                <a:cs typeface="Arial" pitchFamily="34" charset="-120"/>
                 <a:hlinkClick r:id="rId6" invalidUrl="" action="" tgtFrame="" tooltip="" history="1" highlightClick="0" endSnd="0">
                   <a:extLst>
                     <a:ext uri="{A12FA001-AC4F-418D-AE19-62706E023703}">
@@ -4562,9 +4562,9 @@
                 <a:solidFill>
                   <a:srgbClr val="1D7A50"/>
                 </a:solidFill>
-                <a:latin typeface="Be Vietnam Pro" pitchFamily="34" charset="0"/>
-                <a:ea typeface="Be Vietnam Pro" pitchFamily="34" charset="-122"/>
-                <a:cs typeface="Be Vietnam Pro" pitchFamily="34" charset="-120"/>
+                <a:latin typeface="Arial" pitchFamily="34" charset="0"/>
+                <a:ea typeface="Arial" pitchFamily="34" charset="-122"/>
+                <a:cs typeface="Arial" pitchFamily="34" charset="-120"/>
               </a:rPr>
               <a:t>THE ASSISTANT IN THE APP</a:t>
             </a:r>
@@ -4608,9 +4608,9 @@
                 <a:solidFill>
                   <a:srgbClr val="13261D"/>
                 </a:solidFill>
-                <a:latin typeface="Be Vietnam Pro" pitchFamily="34" charset="0"/>
-                <a:ea typeface="Be Vietnam Pro" pitchFamily="34" charset="-122"/>
-                <a:cs typeface="Be Vietnam Pro" pitchFamily="34" charset="-120"/>
+                <a:latin typeface="Arial" pitchFamily="34" charset="0"/>
+                <a:ea typeface="Arial" pitchFamily="34" charset="-122"/>
+                <a:cs typeface="Arial" pitchFamily="34" charset="-120"/>
               </a:rPr>
               <a:t>Answers with photos, charts and buttons</a:t>
             </a:r>
@@ -4652,9 +4652,9 @@
                 <a:solidFill>
                   <a:srgbClr val="13261D"/>
                 </a:solidFill>
-                <a:latin typeface="Be Vietnam Pro" pitchFamily="34" charset="0"/>
-                <a:ea typeface="Be Vietnam Pro" pitchFamily="34" charset="-122"/>
-                <a:cs typeface="Be Vietnam Pro" pitchFamily="34" charset="-120"/>
+                <a:latin typeface="Arial" pitchFamily="34" charset="0"/>
+                <a:ea typeface="Arial" pitchFamily="34" charset="-122"/>
+                <a:cs typeface="Arial" pitchFamily="34" charset="-120"/>
               </a:rPr>
               <a:t>Latest AI photos</a:t>
             </a:r>
@@ -4775,9 +4775,9 @@
                 <a:solidFill>
                   <a:srgbClr val="13261D"/>
                 </a:solidFill>
-                <a:latin typeface="Be Vietnam Pro" pitchFamily="34" charset="0"/>
-                <a:ea typeface="Be Vietnam Pro" pitchFamily="34" charset="-122"/>
-                <a:cs typeface="Be Vietnam Pro" pitchFamily="34" charset="-120"/>
+                <a:latin typeface="Arial" pitchFamily="34" charset="0"/>
+                <a:ea typeface="Arial" pitchFamily="34" charset="-122"/>
+                <a:cs typeface="Arial" pitchFamily="34" charset="-120"/>
               </a:rPr>
               <a:t>Charts in the chat</a:t>
             </a:r>
@@ -4898,9 +4898,9 @@
                 <a:solidFill>
                   <a:srgbClr val="13261D"/>
                 </a:solidFill>
-                <a:latin typeface="Be Vietnam Pro" pitchFamily="34" charset="0"/>
-                <a:ea typeface="Be Vietnam Pro" pitchFamily="34" charset="-122"/>
-                <a:cs typeface="Be Vietnam Pro" pitchFamily="34" charset="-120"/>
+                <a:latin typeface="Arial" pitchFamily="34" charset="0"/>
+                <a:ea typeface="Arial" pitchFamily="34" charset="-122"/>
+                <a:cs typeface="Arial" pitchFamily="34" charset="-120"/>
               </a:rPr>
               <a:t>Ask about a photo</a:t>
             </a:r>
@@ -5021,9 +5021,9 @@
                 <a:solidFill>
                   <a:srgbClr val="13261D"/>
                 </a:solidFill>
-                <a:latin typeface="Be Vietnam Pro" pitchFamily="34" charset="0"/>
-                <a:ea typeface="Be Vietnam Pro" pitchFamily="34" charset="-122"/>
-                <a:cs typeface="Be Vietnam Pro" pitchFamily="34" charset="-120"/>
+                <a:latin typeface="Arial" pitchFamily="34" charset="0"/>
+                <a:ea typeface="Arial" pitchFamily="34" charset="-122"/>
+                <a:cs typeface="Arial" pitchFamily="34" charset="-120"/>
               </a:rPr>
               <a:t>Saved on your Confirm</a:t>
             </a:r>
@@ -5144,9 +5144,9 @@
                 <a:solidFill>
                   <a:srgbClr val="6B7B70"/>
                 </a:solidFill>
-                <a:latin typeface="Be Vietnam Pro" pitchFamily="34" charset="0"/>
-                <a:ea typeface="Be Vietnam Pro" pitchFamily="34" charset="-122"/>
-                <a:cs typeface="Be Vietnam Pro" pitchFamily="34" charset="-120"/>
+                <a:latin typeface="Arial" pitchFamily="34" charset="0"/>
+                <a:ea typeface="Arial" pitchFamily="34" charset="-122"/>
+                <a:cs typeface="Arial" pitchFamily="34" charset="-120"/>
               </a:rPr>
               <a:t>FlyBot · 13 · Full guide: </a:t>
             </a:r>
@@ -5155,9 +5155,9 @@
                 <a:solidFill>
                   <a:srgbClr val="6B7B70"/>
                 </a:solidFill>
-                <a:latin typeface="Be Vietnam Pro" pitchFamily="34" charset="0"/>
-                <a:ea typeface="Be Vietnam Pro" pitchFamily="34" charset="-122"/>
-                <a:cs typeface="Be Vietnam Pro" pitchFamily="34" charset="-120"/>
+                <a:latin typeface="Arial" pitchFamily="34" charset="0"/>
+                <a:ea typeface="Arial" pitchFamily="34" charset="-122"/>
+                <a:cs typeface="Arial" pitchFamily="34" charset="-120"/>
                 <a:hlinkClick r:id="rId5" invalidUrl="" action="" tgtFrame="" tooltip="" history="1" highlightClick="0" endSnd="0">
                   <a:extLst>
                     <a:ext uri="{A12FA001-AC4F-418D-AE19-62706E023703}">
@@ -5238,9 +5238,9 @@
                 <a:solidFill>
                   <a:srgbClr val="1D7A50"/>
                 </a:solidFill>
-                <a:latin typeface="Be Vietnam Pro" pitchFamily="34" charset="0"/>
-                <a:ea typeface="Be Vietnam Pro" pitchFamily="34" charset="-122"/>
-                <a:cs typeface="Be Vietnam Pro" pitchFamily="34" charset="-120"/>
+                <a:latin typeface="Arial" pitchFamily="34" charset="0"/>
+                <a:ea typeface="Arial" pitchFamily="34" charset="-122"/>
+                <a:cs typeface="Arial" pitchFamily="34" charset="-120"/>
               </a:rPr>
               <a:t>FARMS, MAP AND LOGBOOK</a:t>
             </a:r>
@@ -5284,9 +5284,9 @@
                 <a:solidFill>
                   <a:srgbClr val="13261D"/>
                 </a:solidFill>
-                <a:latin typeface="Be Vietnam Pro" pitchFamily="34" charset="0"/>
-                <a:ea typeface="Be Vietnam Pro" pitchFamily="34" charset="-122"/>
-                <a:cs typeface="Be Vietnam Pro" pitchFamily="34" charset="-120"/>
+                <a:latin typeface="Arial" pitchFamily="34" charset="0"/>
+                <a:ea typeface="Arial" pitchFamily="34" charset="-122"/>
+                <a:cs typeface="Arial" pitchFamily="34" charset="-120"/>
               </a:rPr>
               <a:t>See which treatments really work</a:t>
             </a:r>
@@ -5407,9 +5407,9 @@
                 <a:solidFill>
                   <a:srgbClr val="13261D"/>
                 </a:solidFill>
-                <a:latin typeface="Be Vietnam Pro" pitchFamily="34" charset="0"/>
-                <a:ea typeface="Be Vietnam Pro" pitchFamily="34" charset="-122"/>
-                <a:cs typeface="Be Vietnam Pro" pitchFamily="34" charset="-120"/>
+                <a:latin typeface="Arial" pitchFamily="34" charset="0"/>
+                <a:ea typeface="Arial" pitchFamily="34" charset="-122"/>
+                <a:cs typeface="Arial" pitchFamily="34" charset="-120"/>
               </a:rPr>
               <a:t>Farms, plots and map</a:t>
             </a:r>
@@ -5451,9 +5451,9 @@
                 <a:solidFill>
                   <a:srgbClr val="4A5A50"/>
                 </a:solidFill>
-                <a:latin typeface="Be Vietnam Pro" pitchFamily="34" charset="0"/>
-                <a:ea typeface="Be Vietnam Pro" pitchFamily="34" charset="-122"/>
-                <a:cs typeface="Be Vietnam Pro" pitchFamily="34" charset="-120"/>
+                <a:latin typeface="Arial" pitchFamily="34" charset="0"/>
+                <a:ea typeface="Arial" pitchFamily="34" charset="-122"/>
+                <a:cs typeface="Arial" pitchFamily="34" charset="-120"/>
               </a:rPr>
               <a:t>Traps belong to plots; a heat map shows the pest hot spots.</a:t>
             </a:r>
@@ -5495,9 +5495,9 @@
                 <a:solidFill>
                   <a:srgbClr val="13261D"/>
                 </a:solidFill>
-                <a:latin typeface="Be Vietnam Pro" pitchFamily="34" charset="0"/>
-                <a:ea typeface="Be Vietnam Pro" pitchFamily="34" charset="-122"/>
-                <a:cs typeface="Be Vietnam Pro" pitchFamily="34" charset="-120"/>
+                <a:latin typeface="Arial" pitchFamily="34" charset="0"/>
+                <a:ea typeface="Arial" pitchFamily="34" charset="-122"/>
+                <a:cs typeface="Arial" pitchFamily="34" charset="-120"/>
               </a:rPr>
               <a:t>Treatment log</a:t>
             </a:r>
@@ -5539,9 +5539,9 @@
                 <a:solidFill>
                   <a:srgbClr val="4A5A50"/>
                 </a:solidFill>
-                <a:latin typeface="Be Vietnam Pro" pitchFamily="34" charset="0"/>
-                <a:ea typeface="Be Vietnam Pro" pitchFamily="34" charset="-122"/>
-                <a:cs typeface="Be Vietnam Pro" pitchFamily="34" charset="-120"/>
+                <a:latin typeface="Arial" pitchFamily="34" charset="0"/>
+                <a:ea typeface="Arial" pitchFamily="34" charset="-122"/>
+                <a:cs typeface="Arial" pitchFamily="34" charset="-120"/>
               </a:rPr>
               <a:t>Every spray or bait, with its measured effect on catches.</a:t>
             </a:r>
@@ -5583,9 +5583,9 @@
                 <a:solidFill>
                   <a:srgbClr val="13261D"/>
                 </a:solidFill>
-                <a:latin typeface="Be Vietnam Pro" pitchFamily="34" charset="0"/>
-                <a:ea typeface="Be Vietnam Pro" pitchFamily="34" charset="-122"/>
-                <a:cs typeface="Be Vietnam Pro" pitchFamily="34" charset="-120"/>
+                <a:latin typeface="Arial" pitchFamily="34" charset="0"/>
+                <a:ea typeface="Arial" pitchFamily="34" charset="-122"/>
+                <a:cs typeface="Arial" pitchFamily="34" charset="-120"/>
               </a:rPr>
               <a:t>VietGAP record</a:t>
             </a:r>
@@ -5627,9 +5627,9 @@
                 <a:solidFill>
                   <a:srgbClr val="4A5A50"/>
                 </a:solidFill>
-                <a:latin typeface="Be Vietnam Pro" pitchFamily="34" charset="0"/>
-                <a:ea typeface="Be Vietnam Pro" pitchFamily="34" charset="-122"/>
-                <a:cs typeface="Be Vietnam Pro" pitchFamily="34" charset="-120"/>
+                <a:latin typeface="Arial" pitchFamily="34" charset="0"/>
+                <a:ea typeface="Arial" pitchFamily="34" charset="-122"/>
+                <a:cs typeface="Arial" pitchFamily="34" charset="-120"/>
               </a:rPr>
               <a:t>Export the pesticide use record in the VietGAP layout.</a:t>
             </a:r>
@@ -5671,9 +5671,9 @@
                 <a:solidFill>
                   <a:srgbClr val="6B7B70"/>
                 </a:solidFill>
-                <a:latin typeface="Be Vietnam Pro" pitchFamily="34" charset="0"/>
-                <a:ea typeface="Be Vietnam Pro" pitchFamily="34" charset="-122"/>
-                <a:cs typeface="Be Vietnam Pro" pitchFamily="34" charset="-120"/>
+                <a:latin typeface="Arial" pitchFamily="34" charset="0"/>
+                <a:ea typeface="Arial" pitchFamily="34" charset="-122"/>
+                <a:cs typeface="Arial" pitchFamily="34" charset="-120"/>
               </a:rPr>
               <a:t>FlyBot · 14</a:t>
             </a:r>
@@ -5826,9 +5826,9 @@
                 <a:solidFill>
                   <a:srgbClr val="1D7A50"/>
                 </a:solidFill>
-                <a:latin typeface="Be Vietnam Pro" pitchFamily="34" charset="0"/>
-                <a:ea typeface="Be Vietnam Pro" pitchFamily="34" charset="-122"/>
-                <a:cs typeface="Be Vietnam Pro" pitchFamily="34" charset="-120"/>
+                <a:latin typeface="Arial" pitchFamily="34" charset="0"/>
+                <a:ea typeface="Arial" pitchFamily="34" charset="-122"/>
+                <a:cs typeface="Arial" pitchFamily="34" charset="-120"/>
               </a:rPr>
               <a:t>PHONE AND TEAM</a:t>
             </a:r>
@@ -5872,9 +5872,9 @@
                 <a:solidFill>
                   <a:srgbClr val="13261D"/>
                 </a:solidFill>
-                <a:latin typeface="Be Vietnam Pro" pitchFamily="34" charset="0"/>
-                <a:ea typeface="Be Vietnam Pro" pitchFamily="34" charset="-122"/>
-                <a:cs typeface="Be Vietnam Pro" pitchFamily="34" charset="-120"/>
+                <a:latin typeface="Arial" pitchFamily="34" charset="0"/>
+                <a:ea typeface="Arial" pitchFamily="34" charset="-122"/>
+                <a:cs typeface="Arial" pitchFamily="34" charset="-120"/>
               </a:rPr>
               <a:t>The whole team on board, each with the right access</a:t>
             </a:r>
@@ -5891,7 +5891,7 @@
         <p:spPr>
           <a:xfrm>
             <a:off x="3721100" y="3304480"/>
-            <a:ext cx="3943922" cy="279400"/>
+            <a:ext cx="3524250" cy="279400"/>
           </a:xfrm>
           <a:prstGeom prst="rect">
             <a:avLst/>
@@ -5916,9 +5916,9 @@
                 <a:solidFill>
                   <a:srgbClr val="13261D"/>
                 </a:solidFill>
-                <a:latin typeface="Be Vietnam Pro" pitchFamily="34" charset="0"/>
-                <a:ea typeface="Be Vietnam Pro" pitchFamily="34" charset="-122"/>
-                <a:cs typeface="Be Vietnam Pro" pitchFamily="34" charset="-120"/>
+                <a:latin typeface="Arial" pitchFamily="34" charset="0"/>
+                <a:ea typeface="Arial" pitchFamily="34" charset="-122"/>
+                <a:cs typeface="Arial" pitchFamily="34" charset="-120"/>
               </a:rPr>
               <a:t>Installs like an app</a:t>
             </a:r>
@@ -5935,7 +5935,7 @@
         <p:spPr>
           <a:xfrm>
             <a:off x="3721100" y="3609280"/>
-            <a:ext cx="3943922" cy="520700"/>
+            <a:ext cx="3524250" cy="520700"/>
           </a:xfrm>
           <a:prstGeom prst="rect">
             <a:avLst/>
@@ -5960,9 +5960,9 @@
                 <a:solidFill>
                   <a:srgbClr val="4A5A50"/>
                 </a:solidFill>
-                <a:latin typeface="Be Vietnam Pro" pitchFamily="34" charset="0"/>
-                <a:ea typeface="Be Vietnam Pro" pitchFamily="34" charset="-122"/>
-                <a:cs typeface="Be Vietnam Pro" pitchFamily="34" charset="-120"/>
+                <a:latin typeface="Arial" pitchFamily="34" charset="0"/>
+                <a:ea typeface="Arial" pitchFamily="34" charset="-122"/>
+                <a:cs typeface="Arial" pitchFamily="34" charset="-120"/>
               </a:rPr>
               <a:t>Works on the phone with push notifications, in English and Vietnamese.</a:t>
             </a:r>
@@ -6004,9 +6004,9 @@
                 <a:solidFill>
                   <a:srgbClr val="13261D"/>
                 </a:solidFill>
-                <a:latin typeface="Be Vietnam Pro" pitchFamily="34" charset="0"/>
-                <a:ea typeface="Be Vietnam Pro" pitchFamily="34" charset="-122"/>
-                <a:cs typeface="Be Vietnam Pro" pitchFamily="34" charset="-120"/>
+                <a:latin typeface="Arial" pitchFamily="34" charset="0"/>
+                <a:ea typeface="Arial" pitchFamily="34" charset="-122"/>
+                <a:cs typeface="Arial" pitchFamily="34" charset="-120"/>
               </a:rPr>
               <a:t>Roles</a:t>
             </a:r>
@@ -6048,9 +6048,9 @@
                 <a:solidFill>
                   <a:srgbClr val="4A5A50"/>
                 </a:solidFill>
-                <a:latin typeface="Be Vietnam Pro" pitchFamily="34" charset="0"/>
-                <a:ea typeface="Be Vietnam Pro" pitchFamily="34" charset="-122"/>
-                <a:cs typeface="Be Vietnam Pro" pitchFamily="34" charset="-120"/>
+                <a:latin typeface="Arial" pitchFamily="34" charset="0"/>
+                <a:ea typeface="Arial" pitchFamily="34" charset="-122"/>
+                <a:cs typeface="Arial" pitchFamily="34" charset="-120"/>
               </a:rPr>
               <a:t>Admin, manager, viewer; share single cameras or a whole organization.</a:t>
             </a:r>
@@ -6066,7 +6066,95 @@
         </p:nvSpPr>
         <p:spPr>
           <a:xfrm>
-            <a:off x="3721100" y="4104580"/>
+            <a:off x="3721100" y="4254500"/>
+            <a:ext cx="3524250" cy="279400"/>
+          </a:xfrm>
+          <a:prstGeom prst="rect">
+            <a:avLst/>
+          </a:prstGeom>
+          <a:noFill/>
+          <a:ln/>
+        </p:spPr>
+        <p:txBody>
+          <a:bodyPr wrap="square" lIns="0" tIns="0" rIns="0" bIns="0" rtlCol="0" anchor="t">
+            <a:normAutofit/>
+          </a:bodyPr>
+          <a:lstStyle/>
+          <a:p>
+            <a:pPr algn="l" indent="0" marL="0">
+              <a:lnSpc>
+                <a:spcPts val="2000"/>
+              </a:lnSpc>
+              <a:buNone/>
+            </a:pPr>
+            <a:r>
+              <a:rPr lang="en-US" sz="1600" b="1" dirty="0">
+                <a:solidFill>
+                  <a:srgbClr val="13261D"/>
+                </a:solidFill>
+                <a:latin typeface="Arial" pitchFamily="34" charset="0"/>
+                <a:ea typeface="Arial" pitchFamily="34" charset="-122"/>
+                <a:cs typeface="Arial" pitchFamily="34" charset="-120"/>
+              </a:rPr>
+              <a:t>Connects to your systems</a:t>
+            </a:r>
+            <a:endParaRPr lang="en-US" sz="1600" dirty="0"/>
+          </a:p>
+        </p:txBody>
+      </p:sp>
+      <p:sp>
+        <p:nvSpPr>
+          <p:cNvPr id="12" name="Text 9"/>
+          <p:cNvSpPr/>
+          <p:nvPr/>
+        </p:nvSpPr>
+        <p:spPr>
+          <a:xfrm>
+            <a:off x="3721100" y="4559300"/>
+            <a:ext cx="3524250" cy="520700"/>
+          </a:xfrm>
+          <a:prstGeom prst="rect">
+            <a:avLst/>
+          </a:prstGeom>
+          <a:noFill/>
+          <a:ln/>
+        </p:spPr>
+        <p:txBody>
+          <a:bodyPr wrap="square" lIns="0" tIns="0" rIns="0" bIns="0" rtlCol="0" anchor="t">
+            <a:normAutofit/>
+          </a:bodyPr>
+          <a:lstStyle/>
+          <a:p>
+            <a:pPr algn="l" indent="0" marL="0">
+              <a:lnSpc>
+                <a:spcPts val="1950"/>
+              </a:lnSpc>
+              <a:buNone/>
+            </a:pPr>
+            <a:r>
+              <a:rPr lang="en-US" sz="1300" dirty="0">
+                <a:solidFill>
+                  <a:srgbClr val="4A5A50"/>
+                </a:solidFill>
+                <a:latin typeface="Arial" pitchFamily="34" charset="0"/>
+                <a:ea typeface="Arial" pitchFamily="34" charset="-122"/>
+                <a:cs typeface="Arial" pitchFamily="34" charset="-120"/>
+              </a:rPr>
+              <a:t>API keys and webhooks to bring the data into your own software.</a:t>
+            </a:r>
+            <a:endParaRPr lang="en-US" sz="1300" dirty="0"/>
+          </a:p>
+        </p:txBody>
+      </p:sp>
+      <p:sp>
+        <p:nvSpPr>
+          <p:cNvPr id="13" name="Text 10"/>
+          <p:cNvSpPr/>
+          <p:nvPr/>
+        </p:nvSpPr>
+        <p:spPr>
+          <a:xfrm>
+            <a:off x="7550150" y="4254500"/>
             <a:ext cx="3943922" cy="279400"/>
           </a:xfrm>
           <a:prstGeom prst="rect">
@@ -6092,11 +6180,11 @@
                 <a:solidFill>
                   <a:srgbClr val="13261D"/>
                 </a:solidFill>
-                <a:latin typeface="Be Vietnam Pro" pitchFamily="34" charset="0"/>
-                <a:ea typeface="Be Vietnam Pro" pitchFamily="34" charset="-122"/>
-                <a:cs typeface="Be Vietnam Pro" pitchFamily="34" charset="-120"/>
-              </a:rPr>
-              <a:t>Connects to your systems</a:t>
+                <a:latin typeface="Arial" pitchFamily="34" charset="0"/>
+                <a:ea typeface="Arial" pitchFamily="34" charset="-122"/>
+                <a:cs typeface="Arial" pitchFamily="34" charset="-120"/>
+              </a:rPr>
+              <a:t>Operations in view</a:t>
             </a:r>
             <a:endParaRPr lang="en-US" sz="1600" dirty="0"/>
           </a:p>
@@ -6104,13 +6192,13 @@
       </p:sp>
       <p:sp>
         <p:nvSpPr>
-          <p:cNvPr id="12" name="Text 9"/>
-          <p:cNvSpPr/>
-          <p:nvPr/>
-        </p:nvSpPr>
-        <p:spPr>
-          <a:xfrm>
-            <a:off x="3721100" y="4409380"/>
+          <p:cNvPr id="14" name="Text 11"/>
+          <p:cNvSpPr/>
+          <p:nvPr/>
+        </p:nvSpPr>
+        <p:spPr>
+          <a:xfrm>
+            <a:off x="7550150" y="4559300"/>
             <a:ext cx="3943922" cy="520700"/>
           </a:xfrm>
           <a:prstGeom prst="rect">
@@ -6136,97 +6224,9 @@
                 <a:solidFill>
                   <a:srgbClr val="4A5A50"/>
                 </a:solidFill>
-                <a:latin typeface="Be Vietnam Pro" pitchFamily="34" charset="0"/>
-                <a:ea typeface="Be Vietnam Pro" pitchFamily="34" charset="-122"/>
-                <a:cs typeface="Be Vietnam Pro" pitchFamily="34" charset="-120"/>
-              </a:rPr>
-              <a:t>API keys and webhooks to bring the data into your own software.</a:t>
-            </a:r>
-            <a:endParaRPr lang="en-US" sz="1300" dirty="0"/>
-          </a:p>
-        </p:txBody>
-      </p:sp>
-      <p:sp>
-        <p:nvSpPr>
-          <p:cNvPr id="13" name="Text 10"/>
-          <p:cNvSpPr/>
-          <p:nvPr/>
-        </p:nvSpPr>
-        <p:spPr>
-          <a:xfrm>
-            <a:off x="7550150" y="4104580"/>
-            <a:ext cx="3943922" cy="279400"/>
-          </a:xfrm>
-          <a:prstGeom prst="rect">
-            <a:avLst/>
-          </a:prstGeom>
-          <a:noFill/>
-          <a:ln/>
-        </p:spPr>
-        <p:txBody>
-          <a:bodyPr wrap="square" lIns="0" tIns="0" rIns="0" bIns="0" rtlCol="0" anchor="t">
-            <a:normAutofit/>
-          </a:bodyPr>
-          <a:lstStyle/>
-          <a:p>
-            <a:pPr algn="l" indent="0" marL="0">
-              <a:lnSpc>
-                <a:spcPts val="2000"/>
-              </a:lnSpc>
-              <a:buNone/>
-            </a:pPr>
-            <a:r>
-              <a:rPr lang="en-US" sz="1600" b="1" dirty="0">
-                <a:solidFill>
-                  <a:srgbClr val="13261D"/>
-                </a:solidFill>
-                <a:latin typeface="Be Vietnam Pro" pitchFamily="34" charset="0"/>
-                <a:ea typeface="Be Vietnam Pro" pitchFamily="34" charset="-122"/>
-                <a:cs typeface="Be Vietnam Pro" pitchFamily="34" charset="-120"/>
-              </a:rPr>
-              <a:t>Operations in view</a:t>
-            </a:r>
-            <a:endParaRPr lang="en-US" sz="1600" dirty="0"/>
-          </a:p>
-        </p:txBody>
-      </p:sp>
-      <p:sp>
-        <p:nvSpPr>
-          <p:cNvPr id="14" name="Text 11"/>
-          <p:cNvSpPr/>
-          <p:nvPr/>
-        </p:nvSpPr>
-        <p:spPr>
-          <a:xfrm>
-            <a:off x="7550150" y="4409380"/>
-            <a:ext cx="3943922" cy="520700"/>
-          </a:xfrm>
-          <a:prstGeom prst="rect">
-            <a:avLst/>
-          </a:prstGeom>
-          <a:noFill/>
-          <a:ln/>
-        </p:spPr>
-        <p:txBody>
-          <a:bodyPr wrap="square" lIns="0" tIns="0" rIns="0" bIns="0" rtlCol="0" anchor="t">
-            <a:normAutofit/>
-          </a:bodyPr>
-          <a:lstStyle/>
-          <a:p>
-            <a:pPr algn="l" indent="0" marL="0">
-              <a:lnSpc>
-                <a:spcPts val="1950"/>
-              </a:lnSpc>
-              <a:buNone/>
-            </a:pPr>
-            <a:r>
-              <a:rPr lang="en-US" sz="1300" dirty="0">
-                <a:solidFill>
-                  <a:srgbClr val="4A5A50"/>
-                </a:solidFill>
-                <a:latin typeface="Be Vietnam Pro" pitchFamily="34" charset="0"/>
-                <a:ea typeface="Be Vietnam Pro" pitchFamily="34" charset="-122"/>
-                <a:cs typeface="Be Vietnam Pro" pitchFamily="34" charset="-120"/>
+                <a:latin typeface="Arial" pitchFamily="34" charset="0"/>
+                <a:ea typeface="Arial" pitchFamily="34" charset="-122"/>
+                <a:cs typeface="Arial" pitchFamily="34" charset="-120"/>
               </a:rPr>
               <a:t>An activity log and a capture pipeline monitor for admins.</a:t>
             </a:r>
@@ -6268,9 +6268,9 @@
                 <a:solidFill>
                   <a:srgbClr val="6B7B70"/>
                 </a:solidFill>
-                <a:latin typeface="Be Vietnam Pro" pitchFamily="34" charset="0"/>
-                <a:ea typeface="Be Vietnam Pro" pitchFamily="34" charset="-122"/>
-                <a:cs typeface="Be Vietnam Pro" pitchFamily="34" charset="-120"/>
+                <a:latin typeface="Arial" pitchFamily="34" charset="0"/>
+                <a:ea typeface="Arial" pitchFamily="34" charset="-122"/>
+                <a:cs typeface="Arial" pitchFamily="34" charset="-120"/>
               </a:rPr>
               <a:t>FlyBot · 15</a:t>
             </a:r>
@@ -6318,7 +6318,7 @@
         </p:nvSpPr>
         <p:spPr>
           <a:xfrm>
-            <a:off x="812800" y="812800"/>
+            <a:off x="812800" y="711200"/>
             <a:ext cx="10883392" cy="238720"/>
           </a:xfrm>
           <a:prstGeom prst="rect">
@@ -6344,9 +6344,9 @@
                 <a:solidFill>
                   <a:srgbClr val="F2C230"/>
                 </a:solidFill>
-                <a:latin typeface="Be Vietnam Pro" pitchFamily="34" charset="0"/>
-                <a:ea typeface="Be Vietnam Pro" pitchFamily="34" charset="-122"/>
-                <a:cs typeface="Be Vietnam Pro" pitchFamily="34" charset="-120"/>
+                <a:latin typeface="Arial" pitchFamily="34" charset="0"/>
+                <a:ea typeface="Arial" pitchFamily="34" charset="-122"/>
+                <a:cs typeface="Arial" pitchFamily="34" charset="-120"/>
               </a:rPr>
               <a:t>GET STARTED</a:t>
             </a:r>
@@ -6364,7 +6364,7 @@
         </p:nvSpPr>
         <p:spPr>
           <a:xfrm>
-            <a:off x="812800" y="1127720"/>
+            <a:off x="812800" y="1026120"/>
             <a:ext cx="10883392" cy="537369"/>
           </a:xfrm>
           <a:prstGeom prst="rect">
@@ -6390,9 +6390,9 @@
                 <a:solidFill>
                   <a:srgbClr val="F5F7F1"/>
                 </a:solidFill>
-                <a:latin typeface="Be Vietnam Pro" pitchFamily="34" charset="0"/>
-                <a:ea typeface="Be Vietnam Pro" pitchFamily="34" charset="-122"/>
-                <a:cs typeface="Be Vietnam Pro" pitchFamily="34" charset="-120"/>
+                <a:latin typeface="Arial" pitchFamily="34" charset="0"/>
+                <a:ea typeface="Arial" pitchFamily="34" charset="-122"/>
+                <a:cs typeface="Arial" pitchFamily="34" charset="-120"/>
               </a:rPr>
               <a:t>Three steps to your first self-reporting trap</a:t>
             </a:r>
@@ -6408,7 +6408,7 @@
         </p:nvSpPr>
         <p:spPr>
           <a:xfrm>
-            <a:off x="812800" y="2058789"/>
+            <a:off x="812800" y="1906389"/>
             <a:ext cx="3386634" cy="0"/>
           </a:xfrm>
           <a:prstGeom prst="line">
@@ -6431,7 +6431,7 @@
         </p:nvSpPr>
         <p:spPr>
           <a:xfrm>
-            <a:off x="812800" y="2274689"/>
+            <a:off x="812800" y="2122289"/>
             <a:ext cx="3488233" cy="416520"/>
           </a:xfrm>
           <a:prstGeom prst="rect">
@@ -6457,9 +6457,9 @@
                 <a:solidFill>
                   <a:srgbClr val="F2C230"/>
                 </a:solidFill>
-                <a:latin typeface="Be Vietnam Pro" pitchFamily="34" charset="0"/>
-                <a:ea typeface="Be Vietnam Pro" pitchFamily="34" charset="-122"/>
-                <a:cs typeface="Be Vietnam Pro" pitchFamily="34" charset="-120"/>
+                <a:latin typeface="Arial" pitchFamily="34" charset="0"/>
+                <a:ea typeface="Arial" pitchFamily="34" charset="-122"/>
+                <a:cs typeface="Arial" pitchFamily="34" charset="-120"/>
               </a:rPr>
               <a:t>01</a:t>
             </a:r>
@@ -6475,7 +6475,7 @@
         </p:nvSpPr>
         <p:spPr>
           <a:xfrm>
-            <a:off x="812800" y="2792809"/>
+            <a:off x="812800" y="2640409"/>
             <a:ext cx="3488233" cy="311150"/>
           </a:xfrm>
           <a:prstGeom prst="rect">
@@ -6501,9 +6501,9 @@
                 <a:solidFill>
                   <a:srgbClr val="F5F7F1"/>
                 </a:solidFill>
-                <a:latin typeface="Be Vietnam Pro" pitchFamily="34" charset="0"/>
-                <a:ea typeface="Be Vietnam Pro" pitchFamily="34" charset="-122"/>
-                <a:cs typeface="Be Vietnam Pro" pitchFamily="34" charset="-120"/>
+                <a:latin typeface="Arial" pitchFamily="34" charset="0"/>
+                <a:ea typeface="Arial" pitchFamily="34" charset="-122"/>
+                <a:cs typeface="Arial" pitchFamily="34" charset="-120"/>
               </a:rPr>
               <a:t>Mount a camera on the trap</a:t>
             </a:r>
@@ -6519,7 +6519,7 @@
         </p:nvSpPr>
         <p:spPr>
           <a:xfrm>
-            <a:off x="812800" y="3205559"/>
+            <a:off x="812800" y="3053159"/>
             <a:ext cx="3488233" cy="520700"/>
           </a:xfrm>
           <a:prstGeom prst="rect">
@@ -6545,9 +6545,9 @@
                 <a:solidFill>
                   <a:srgbClr val="BFD3C6"/>
                 </a:solidFill>
-                <a:latin typeface="Be Vietnam Pro" pitchFamily="34" charset="0"/>
-                <a:ea typeface="Be Vietnam Pro" pitchFamily="34" charset="-122"/>
-                <a:cs typeface="Be Vietnam Pro" pitchFamily="34" charset="-120"/>
+                <a:latin typeface="Arial" pitchFamily="34" charset="0"/>
+                <a:ea typeface="Arial" pitchFamily="34" charset="-122"/>
+                <a:cs typeface="Arial" pitchFamily="34" charset="-120"/>
               </a:rPr>
               <a:t>An EZVIZ camera facing the sticky card or the lure trap.</a:t>
             </a:r>
@@ -6563,7 +6563,7 @@
         </p:nvSpPr>
         <p:spPr>
           <a:xfrm>
-            <a:off x="4402634" y="2058789"/>
+            <a:off x="4402634" y="1906389"/>
             <a:ext cx="3386733" cy="0"/>
           </a:xfrm>
           <a:prstGeom prst="line">
@@ -6586,7 +6586,7 @@
         </p:nvSpPr>
         <p:spPr>
           <a:xfrm>
-            <a:off x="4402634" y="2274689"/>
+            <a:off x="4402634" y="2122289"/>
             <a:ext cx="3488335" cy="416520"/>
           </a:xfrm>
           <a:prstGeom prst="rect">
@@ -6612,9 +6612,9 @@
                 <a:solidFill>
                   <a:srgbClr val="F2C230"/>
                 </a:solidFill>
-                <a:latin typeface="Be Vietnam Pro" pitchFamily="34" charset="0"/>
-                <a:ea typeface="Be Vietnam Pro" pitchFamily="34" charset="-122"/>
-                <a:cs typeface="Be Vietnam Pro" pitchFamily="34" charset="-120"/>
+                <a:latin typeface="Arial" pitchFamily="34" charset="0"/>
+                <a:ea typeface="Arial" pitchFamily="34" charset="-122"/>
+                <a:cs typeface="Arial" pitchFamily="34" charset="-120"/>
               </a:rPr>
               <a:t>02</a:t>
             </a:r>
@@ -6630,7 +6630,7 @@
         </p:nvSpPr>
         <p:spPr>
           <a:xfrm>
-            <a:off x="4402634" y="2792809"/>
+            <a:off x="4402634" y="2640409"/>
             <a:ext cx="3488335" cy="311150"/>
           </a:xfrm>
           <a:prstGeom prst="rect">
@@ -6656,9 +6656,9 @@
                 <a:solidFill>
                   <a:srgbClr val="F5F7F1"/>
                 </a:solidFill>
-                <a:latin typeface="Be Vietnam Pro" pitchFamily="34" charset="0"/>
-                <a:ea typeface="Be Vietnam Pro" pitchFamily="34" charset="-122"/>
-                <a:cs typeface="Be Vietnam Pro" pitchFamily="34" charset="-120"/>
+                <a:latin typeface="Arial" pitchFamily="34" charset="0"/>
+                <a:ea typeface="Arial" pitchFamily="34" charset="-122"/>
+                <a:cs typeface="Arial" pitchFamily="34" charset="-120"/>
               </a:rPr>
               <a:t>Add it to FlyBot</a:t>
             </a:r>
@@ -6674,7 +6674,7 @@
         </p:nvSpPr>
         <p:spPr>
           <a:xfrm>
-            <a:off x="4402634" y="3205559"/>
+            <a:off x="4402634" y="3053159"/>
             <a:ext cx="3488335" cy="520700"/>
           </a:xfrm>
           <a:prstGeom prst="rect">
@@ -6700,9 +6700,9 @@
                 <a:solidFill>
                   <a:srgbClr val="BFD3C6"/>
                 </a:solidFill>
-                <a:latin typeface="Be Vietnam Pro" pitchFamily="34" charset="0"/>
-                <a:ea typeface="Be Vietnam Pro" pitchFamily="34" charset="-122"/>
-                <a:cs typeface="Be Vietnam Pro" pitchFamily="34" charset="-120"/>
+                <a:latin typeface="Arial" pitchFamily="34" charset="0"/>
+                <a:ea typeface="Arial" pitchFamily="34" charset="-122"/>
+                <a:cs typeface="Arial" pitchFamily="34" charset="-120"/>
               </a:rPr>
               <a:t>Enter the serial number and verification code, pick the trap kind and schedule.</a:t>
             </a:r>
@@ -6718,7 +6718,7 @@
         </p:nvSpPr>
         <p:spPr>
           <a:xfrm>
-            <a:off x="7992566" y="2058789"/>
+            <a:off x="7992566" y="1906389"/>
             <a:ext cx="3386634" cy="0"/>
           </a:xfrm>
           <a:prstGeom prst="line">
@@ -6741,7 +6741,7 @@
         </p:nvSpPr>
         <p:spPr>
           <a:xfrm>
-            <a:off x="7992566" y="2274689"/>
+            <a:off x="7992566" y="2122289"/>
             <a:ext cx="3488233" cy="416520"/>
           </a:xfrm>
           <a:prstGeom prst="rect">
@@ -6767,9 +6767,9 @@
                 <a:solidFill>
                   <a:srgbClr val="F2C230"/>
                 </a:solidFill>
-                <a:latin typeface="Be Vietnam Pro" pitchFamily="34" charset="0"/>
-                <a:ea typeface="Be Vietnam Pro" pitchFamily="34" charset="-122"/>
-                <a:cs typeface="Be Vietnam Pro" pitchFamily="34" charset="-120"/>
+                <a:latin typeface="Arial" pitchFamily="34" charset="0"/>
+                <a:ea typeface="Arial" pitchFamily="34" charset="-122"/>
+                <a:cs typeface="Arial" pitchFamily="34" charset="-120"/>
               </a:rPr>
               <a:t>03</a:t>
             </a:r>
@@ -6785,7 +6785,7 @@
         </p:nvSpPr>
         <p:spPr>
           <a:xfrm>
-            <a:off x="7992566" y="2792809"/>
+            <a:off x="7992566" y="2640409"/>
             <a:ext cx="3488233" cy="311150"/>
           </a:xfrm>
           <a:prstGeom prst="rect">
@@ -6811,9 +6811,9 @@
                 <a:solidFill>
                   <a:srgbClr val="F5F7F1"/>
                 </a:solidFill>
-                <a:latin typeface="Be Vietnam Pro" pitchFamily="34" charset="0"/>
-                <a:ea typeface="Be Vietnam Pro" pitchFamily="34" charset="-122"/>
-                <a:cs typeface="Be Vietnam Pro" pitchFamily="34" charset="-120"/>
+                <a:latin typeface="Arial" pitchFamily="34" charset="0"/>
+                <a:ea typeface="Arial" pitchFamily="34" charset="-122"/>
+                <a:cs typeface="Arial" pitchFamily="34" charset="-120"/>
               </a:rPr>
               <a:t>Set thresholds and channels</a:t>
             </a:r>
@@ -6829,7 +6829,7 @@
         </p:nvSpPr>
         <p:spPr>
           <a:xfrm>
-            <a:off x="7992566" y="3205559"/>
+            <a:off x="7992566" y="3053159"/>
             <a:ext cx="3488233" cy="520700"/>
           </a:xfrm>
           <a:prstGeom prst="rect">
@@ -6855,9 +6855,9 @@
                 <a:solidFill>
                   <a:srgbClr val="BFD3C6"/>
                 </a:solidFill>
-                <a:latin typeface="Be Vietnam Pro" pitchFamily="34" charset="0"/>
-                <a:ea typeface="Be Vietnam Pro" pitchFamily="34" charset="-122"/>
-                <a:cs typeface="Be Vietnam Pro" pitchFamily="34" charset="-120"/>
+                <a:latin typeface="Arial" pitchFamily="34" charset="0"/>
+                <a:ea typeface="Arial" pitchFamily="34" charset="-122"/>
+                <a:cs typeface="Arial" pitchFamily="34" charset="-120"/>
               </a:rPr>
               <a:t>A threshold per trap; alerts by phone, email and Telegram.</a:t>
             </a:r>
@@ -6865,16 +6865,85 @@
           </a:p>
         </p:txBody>
       </p:sp>
-      <p:sp>
-        <p:nvSpPr>
-          <p:cNvPr id="16" name="Text 14"/>
-          <p:cNvSpPr/>
-          <p:nvPr/>
-        </p:nvSpPr>
-        <p:spPr>
-          <a:xfrm>
-            <a:off x="812800" y="6238280"/>
-            <a:ext cx="10883392" cy="238720"/>
+      <p:pic>
+        <p:nvPicPr>
+          <p:cNvPr id="16" name="Image 0" descr="QR code opening ezviz.agrhub.com">    </p:cNvPr>
+          <p:cNvPicPr>
+            <a:picLocks noChangeAspect="1"/>
+          </p:cNvPicPr>
+          <p:nvPr/>
+        </p:nvPicPr>
+        <p:blipFill>
+          <a:blip r:embed="rId1"/>
+          <a:srcRect l="0" r="0" t="0" b="0"/>
+          <a:stretch/>
+        </p:blipFill>
+        <p:spPr>
+          <a:xfrm>
+            <a:off x="812800" y="3904059"/>
+            <a:ext cx="1143000" cy="1143000"/>
+          </a:xfrm>
+          <a:prstGeom prst="roundRect">
+            <a:avLst>
+              <a:gd name="adj" fmla="val 6667"/>
+            </a:avLst>
+          </a:prstGeom>
+        </p:spPr>
+      </p:pic>
+      <p:sp>
+        <p:nvSpPr>
+          <p:cNvPr id="17" name="Text 14"/>
+          <p:cNvSpPr/>
+          <p:nvPr/>
+        </p:nvSpPr>
+        <p:spPr>
+          <a:xfrm>
+            <a:off x="2108200" y="4210149"/>
+            <a:ext cx="1585793" cy="292100"/>
+          </a:xfrm>
+          <a:prstGeom prst="rect">
+            <a:avLst/>
+          </a:prstGeom>
+          <a:noFill/>
+          <a:ln/>
+        </p:spPr>
+        <p:txBody>
+          <a:bodyPr wrap="square" lIns="0" tIns="0" rIns="0" bIns="0" rtlCol="0" anchor="t">
+            <a:normAutofit/>
+          </a:bodyPr>
+          <a:lstStyle/>
+          <a:p>
+            <a:pPr algn="l" indent="0" marL="0">
+              <a:lnSpc>
+                <a:spcPts val="2100"/>
+              </a:lnSpc>
+              <a:buNone/>
+            </a:pPr>
+            <a:r>
+              <a:rPr lang="en-US" sz="1500" b="1" dirty="0">
+                <a:solidFill>
+                  <a:srgbClr val="F5F7F1"/>
+                </a:solidFill>
+                <a:latin typeface="Arial" pitchFamily="34" charset="0"/>
+                <a:ea typeface="Arial" pitchFamily="34" charset="-122"/>
+                <a:cs typeface="Arial" pitchFamily="34" charset="-120"/>
+              </a:rPr>
+              <a:t>Open the app</a:t>
+            </a:r>
+            <a:endParaRPr lang="en-US" sz="1500" dirty="0"/>
+          </a:p>
+        </p:txBody>
+      </p:sp>
+      <p:sp>
+        <p:nvSpPr>
+          <p:cNvPr id="18" name="Text 15"/>
+          <p:cNvSpPr/>
+          <p:nvPr/>
+        </p:nvSpPr>
+        <p:spPr>
+          <a:xfrm>
+            <a:off x="2108200" y="4527649"/>
+            <a:ext cx="1585793" cy="238720"/>
           </a:xfrm>
           <a:prstGeom prst="rect">
             <a:avLst/>
@@ -6895,75 +6964,13 @@
               <a:buNone/>
             </a:pPr>
             <a:r>
-              <a:rPr lang="en-US" sz="1200" dirty="0">
-                <a:solidFill>
-                  <a:srgbClr val="8FA898"/>
-                </a:solidFill>
-                <a:latin typeface="Be Vietnam Pro" pitchFamily="34" charset="0"/>
-                <a:ea typeface="Be Vietnam Pro" pitchFamily="34" charset="-122"/>
-                <a:cs typeface="Be Vietnam Pro" pitchFamily="34" charset="-120"/>
-              </a:rPr>
-              <a:t>Contact: </a:t>
-            </a:r>
-            <a:r>
-              <a:rPr lang="en-US" sz="1200" dirty="0">
-                <a:solidFill>
-                  <a:srgbClr val="8FA898"/>
-                </a:solidFill>
-                <a:latin typeface="Be Vietnam Pro" pitchFamily="34" charset="0"/>
-                <a:ea typeface="Be Vietnam Pro" pitchFamily="34" charset="-122"/>
-                <a:cs typeface="Be Vietnam Pro" pitchFamily="34" charset="-120"/>
-              </a:rPr>
-              <a:t>contact@agrhub.com</a:t>
-            </a:r>
-            <a:r>
-              <a:rPr lang="en-US" sz="1200" dirty="0">
-                <a:solidFill>
-                  <a:srgbClr val="8FA898"/>
-                </a:solidFill>
-                <a:latin typeface="Be Vietnam Pro" pitchFamily="34" charset="0"/>
-                <a:ea typeface="Be Vietnam Pro" pitchFamily="34" charset="-122"/>
-                <a:cs typeface="Be Vietnam Pro" pitchFamily="34" charset="-120"/>
-              </a:rPr>
-              <a:t> · </a:t>
-            </a:r>
-            <a:r>
               <a:rPr lang="en-US" sz="1200" u="sng" dirty="0">
                 <a:solidFill>
-                  <a:srgbClr val="8FA898"/>
-                </a:solidFill>
-                <a:latin typeface="Be Vietnam Pro" pitchFamily="34" charset="0"/>
-                <a:ea typeface="Be Vietnam Pro" pitchFamily="34" charset="-122"/>
-                <a:cs typeface="Be Vietnam Pro" pitchFamily="34" charset="-120"/>
-                <a:hlinkClick r:id="rId1" invalidUrl="" action="" tgtFrame="" tooltip="" history="1" highlightClick="0" endSnd="0">
-                  <a:extLst>
-                    <a:ext uri="{A12FA001-AC4F-418D-AE19-62706E023703}">
-                      <ahyp:hlinkClr xmlns:ahyp="http://schemas.microsoft.com/office/drawing/2018/hyperlinkcolor" val="tx"/>
-                    </a:ext>
-                  </a:extLst>
-                </a:hlinkClick>
-              </a:rPr>
-              <a:t>ezviz.agrhub.com</a:t>
-            </a:r>
-            <a:r>
-              <a:rPr lang="en-US" sz="1200" dirty="0">
-                <a:solidFill>
-                  <a:srgbClr val="8FA898"/>
-                </a:solidFill>
-                <a:latin typeface="Be Vietnam Pro" pitchFamily="34" charset="0"/>
-                <a:ea typeface="Be Vietnam Pro" pitchFamily="34" charset="-122"/>
-                <a:cs typeface="Be Vietnam Pro" pitchFamily="34" charset="-120"/>
-              </a:rPr>
-              <a:t> · </a:t>
-            </a:r>
-            <a:r>
-              <a:rPr lang="en-US" sz="1200" u="sng" dirty="0">
-                <a:solidFill>
-                  <a:srgbClr val="8FA898"/>
-                </a:solidFill>
-                <a:latin typeface="Be Vietnam Pro" pitchFamily="34" charset="0"/>
-                <a:ea typeface="Be Vietnam Pro" pitchFamily="34" charset="-122"/>
-                <a:cs typeface="Be Vietnam Pro" pitchFamily="34" charset="-120"/>
+                  <a:srgbClr val="BFD3C6"/>
+                </a:solidFill>
+                <a:latin typeface="Arial" pitchFamily="34" charset="0"/>
+                <a:ea typeface="Arial" pitchFamily="34" charset="-122"/>
+                <a:cs typeface="Arial" pitchFamily="34" charset="-120"/>
                 <a:hlinkClick r:id="rId2" invalidUrl="" action="" tgtFrame="" tooltip="" history="1" highlightClick="0" endSnd="0">
                   <a:extLst>
                     <a:ext uri="{A12FA001-AC4F-418D-AE19-62706E023703}">
@@ -6972,6 +6979,239 @@
                   </a:extLst>
                 </a:hlinkClick>
               </a:rPr>
+              <a:t>ezviz.agrhub.com</a:t>
+            </a:r>
+            <a:endParaRPr lang="en-US" sz="1200" dirty="0"/>
+          </a:p>
+        </p:txBody>
+      </p:sp>
+      <p:pic>
+        <p:nvPicPr>
+          <p:cNvPr id="19" name="Image 1" descr="QR code opening the FlyBot product tour">    </p:cNvPr>
+          <p:cNvPicPr>
+            <a:picLocks noChangeAspect="1"/>
+          </p:cNvPicPr>
+          <p:nvPr/>
+        </p:nvPicPr>
+        <p:blipFill>
+          <a:blip r:embed="rId3"/>
+          <a:srcRect l="0" r="0" t="0" b="0"/>
+          <a:stretch/>
+        </p:blipFill>
+        <p:spPr>
+          <a:xfrm>
+            <a:off x="3886895" y="3904059"/>
+            <a:ext cx="1143000" cy="1143000"/>
+          </a:xfrm>
+          <a:prstGeom prst="roundRect">
+            <a:avLst>
+              <a:gd name="adj" fmla="val 6667"/>
+            </a:avLst>
+          </a:prstGeom>
+        </p:spPr>
+      </p:pic>
+      <p:sp>
+        <p:nvSpPr>
+          <p:cNvPr id="20" name="Text 16"/>
+          <p:cNvSpPr/>
+          <p:nvPr/>
+        </p:nvSpPr>
+        <p:spPr>
+          <a:xfrm>
+            <a:off x="5182295" y="4210149"/>
+            <a:ext cx="3060383" cy="292100"/>
+          </a:xfrm>
+          <a:prstGeom prst="rect">
+            <a:avLst/>
+          </a:prstGeom>
+          <a:noFill/>
+          <a:ln/>
+        </p:spPr>
+        <p:txBody>
+          <a:bodyPr wrap="square" lIns="0" tIns="0" rIns="0" bIns="0" rtlCol="0" anchor="t">
+            <a:normAutofit/>
+          </a:bodyPr>
+          <a:lstStyle/>
+          <a:p>
+            <a:pPr algn="l" indent="0" marL="0">
+              <a:lnSpc>
+                <a:spcPts val="2100"/>
+              </a:lnSpc>
+              <a:buNone/>
+            </a:pPr>
+            <a:r>
+              <a:rPr lang="en-US" sz="1500" b="1" dirty="0">
+                <a:solidFill>
+                  <a:srgbClr val="F5F7F1"/>
+                </a:solidFill>
+                <a:latin typeface="Arial" pitchFamily="34" charset="0"/>
+                <a:ea typeface="Arial" pitchFamily="34" charset="-122"/>
+                <a:cs typeface="Arial" pitchFamily="34" charset="-120"/>
+              </a:rPr>
+              <a:t>Watch the 82-second tour</a:t>
+            </a:r>
+            <a:endParaRPr lang="en-US" sz="1500" dirty="0"/>
+          </a:p>
+        </p:txBody>
+      </p:sp>
+      <p:sp>
+        <p:nvSpPr>
+          <p:cNvPr id="21" name="Text 17"/>
+          <p:cNvSpPr/>
+          <p:nvPr/>
+        </p:nvSpPr>
+        <p:spPr>
+          <a:xfrm>
+            <a:off x="5182295" y="4527649"/>
+            <a:ext cx="2626828" cy="238720"/>
+          </a:xfrm>
+          <a:prstGeom prst="rect">
+            <a:avLst/>
+          </a:prstGeom>
+          <a:noFill/>
+          <a:ln/>
+        </p:spPr>
+        <p:txBody>
+          <a:bodyPr wrap="square" lIns="0" tIns="0" rIns="0" bIns="0" rtlCol="0" anchor="t">
+            <a:normAutofit/>
+          </a:bodyPr>
+          <a:lstStyle/>
+          <a:p>
+            <a:pPr algn="l" indent="0" marL="0">
+              <a:lnSpc>
+                <a:spcPts val="1680"/>
+              </a:lnSpc>
+              <a:buNone/>
+            </a:pPr>
+            <a:r>
+              <a:rPr lang="en-US" sz="1200" u="sng" dirty="0">
+                <a:solidFill>
+                  <a:srgbClr val="BFD3C6"/>
+                </a:solidFill>
+                <a:latin typeface="Arial" pitchFamily="34" charset="0"/>
+                <a:ea typeface="Arial" pitchFamily="34" charset="-122"/>
+                <a:cs typeface="Arial" pitchFamily="34" charset="-120"/>
+                <a:hlinkClick r:id="rId4" invalidUrl="" action="" tgtFrame="" tooltip="" history="1" highlightClick="0" endSnd="0">
+                  <a:extLst>
+                    <a:ext uri="{A12FA001-AC4F-418D-AE19-62706E023703}">
+                      <ahyp:hlinkClr xmlns:ahyp="http://schemas.microsoft.com/office/drawing/2018/hyperlinkcolor" val="tx"/>
+                    </a:ext>
+                  </a:extLst>
+                </a:hlinkClick>
+              </a:rPr>
+              <a:t>Scan with your phone camera</a:t>
+            </a:r>
+            <a:endParaRPr lang="en-US" sz="1200" dirty="0"/>
+          </a:p>
+        </p:txBody>
+      </p:sp>
+      <p:sp>
+        <p:nvSpPr>
+          <p:cNvPr id="22" name="Text 18"/>
+          <p:cNvSpPr/>
+          <p:nvPr/>
+        </p:nvSpPr>
+        <p:spPr>
+          <a:xfrm>
+            <a:off x="812800" y="6238280"/>
+            <a:ext cx="10883392" cy="238720"/>
+          </a:xfrm>
+          <a:prstGeom prst="rect">
+            <a:avLst/>
+          </a:prstGeom>
+          <a:noFill/>
+          <a:ln/>
+        </p:spPr>
+        <p:txBody>
+          <a:bodyPr wrap="square" lIns="0" tIns="0" rIns="0" bIns="0" rtlCol="0" anchor="t">
+            <a:normAutofit/>
+          </a:bodyPr>
+          <a:lstStyle/>
+          <a:p>
+            <a:pPr algn="l" indent="0" marL="0">
+              <a:lnSpc>
+                <a:spcPts val="1680"/>
+              </a:lnSpc>
+              <a:buNone/>
+            </a:pPr>
+            <a:r>
+              <a:rPr lang="en-US" sz="1200" dirty="0">
+                <a:solidFill>
+                  <a:srgbClr val="8FA898"/>
+                </a:solidFill>
+                <a:latin typeface="Arial" pitchFamily="34" charset="0"/>
+                <a:ea typeface="Arial" pitchFamily="34" charset="-122"/>
+                <a:cs typeface="Arial" pitchFamily="34" charset="-120"/>
+              </a:rPr>
+              <a:t>Contact: </a:t>
+            </a:r>
+            <a:r>
+              <a:rPr lang="en-US" sz="1200" dirty="0">
+                <a:solidFill>
+                  <a:srgbClr val="8FA898"/>
+                </a:solidFill>
+                <a:latin typeface="Arial" pitchFamily="34" charset="0"/>
+                <a:ea typeface="Arial" pitchFamily="34" charset="-122"/>
+                <a:cs typeface="Arial" pitchFamily="34" charset="-120"/>
+              </a:rPr>
+              <a:t>contact@agrhub.com</a:t>
+            </a:r>
+            <a:r>
+              <a:rPr lang="en-US" sz="1200" dirty="0">
+                <a:solidFill>
+                  <a:srgbClr val="8FA898"/>
+                </a:solidFill>
+                <a:latin typeface="Arial" pitchFamily="34" charset="0"/>
+                <a:ea typeface="Arial" pitchFamily="34" charset="-122"/>
+                <a:cs typeface="Arial" pitchFamily="34" charset="-120"/>
+              </a:rPr>
+              <a:t> · </a:t>
+            </a:r>
+            <a:r>
+              <a:rPr lang="en-US" sz="1200" u="sng" dirty="0">
+                <a:solidFill>
+                  <a:srgbClr val="8FA898"/>
+                </a:solidFill>
+                <a:latin typeface="Arial" pitchFamily="34" charset="0"/>
+                <a:ea typeface="Arial" pitchFamily="34" charset="-122"/>
+                <a:cs typeface="Arial" pitchFamily="34" charset="-120"/>
+                <a:hlinkClick r:id="rId5" invalidUrl="" action="" tgtFrame="" tooltip="" history="1" highlightClick="0" endSnd="0">
+                  <a:extLst>
+                    <a:ext uri="{A12FA001-AC4F-418D-AE19-62706E023703}">
+                      <ahyp:hlinkClr xmlns:ahyp="http://schemas.microsoft.com/office/drawing/2018/hyperlinkcolor" val="tx"/>
+                    </a:ext>
+                  </a:extLst>
+                </a:hlinkClick>
+              </a:rPr>
+              <a:t>ezviz.agrhub.com</a:t>
+            </a:r>
+            <a:r>
+              <a:rPr lang="en-US" sz="1200" dirty="0">
+                <a:solidFill>
+                  <a:srgbClr val="8FA898"/>
+                </a:solidFill>
+                <a:latin typeface="Arial" pitchFamily="34" charset="0"/>
+                <a:ea typeface="Arial" pitchFamily="34" charset="-122"/>
+                <a:cs typeface="Arial" pitchFamily="34" charset="-120"/>
+              </a:rPr>
+              <a:t> · </a:t>
+            </a:r>
+            <a:r>
+              <a:rPr lang="en-US" sz="1200" u="sng" dirty="0">
+                <a:solidFill>
+                  <a:srgbClr val="8FA898"/>
+                </a:solidFill>
+                <a:latin typeface="Arial" pitchFamily="34" charset="0"/>
+                <a:ea typeface="Arial" pitchFamily="34" charset="-122"/>
+                <a:cs typeface="Arial" pitchFamily="34" charset="-120"/>
+                <a:hlinkClick r:id="rId6" invalidUrl="" action="" tgtFrame="" tooltip="" history="1" highlightClick="0" endSnd="0">
+                  <a:extLst>
+                    <a:ext uri="{A12FA001-AC4F-418D-AE19-62706E023703}">
+                      <ahyp:hlinkClr xmlns:ahyp="http://schemas.microsoft.com/office/drawing/2018/hyperlinkcolor" val="tx"/>
+                    </a:ext>
+                  </a:extLst>
+                </a:hlinkClick>
+              </a:rPr>
               <a:t>Guide</a:t>
             </a:r>
             <a:r>
@@ -6979,9 +7219,9 @@
                 <a:solidFill>
                   <a:srgbClr val="8FA898"/>
                 </a:solidFill>
-                <a:latin typeface="Be Vietnam Pro" pitchFamily="34" charset="0"/>
-                <a:ea typeface="Be Vietnam Pro" pitchFamily="34" charset="-122"/>
-                <a:cs typeface="Be Vietnam Pro" pitchFamily="34" charset="-120"/>
+                <a:latin typeface="Arial" pitchFamily="34" charset="0"/>
+                <a:ea typeface="Arial" pitchFamily="34" charset="-122"/>
+                <a:cs typeface="Arial" pitchFamily="34" charset="-120"/>
               </a:rPr>
               <a:t> · </a:t>
             </a:r>
@@ -6990,10 +7230,10 @@
                 <a:solidFill>
                   <a:srgbClr val="8FA898"/>
                 </a:solidFill>
-                <a:latin typeface="Be Vietnam Pro" pitchFamily="34" charset="0"/>
-                <a:ea typeface="Be Vietnam Pro" pitchFamily="34" charset="-122"/>
-                <a:cs typeface="Be Vietnam Pro" pitchFamily="34" charset="-120"/>
-                <a:hlinkClick r:id="rId3" invalidUrl="" action="" tgtFrame="" tooltip="" history="1" highlightClick="0" endSnd="0">
+                <a:latin typeface="Arial" pitchFamily="34" charset="0"/>
+                <a:ea typeface="Arial" pitchFamily="34" charset="-122"/>
+                <a:cs typeface="Arial" pitchFamily="34" charset="-120"/>
+                <a:hlinkClick r:id="rId7" invalidUrl="" action="" tgtFrame="" tooltip="" history="1" highlightClick="0" endSnd="0">
                   <a:extLst>
                     <a:ext uri="{A12FA001-AC4F-418D-AE19-62706E023703}">
                       <ahyp:hlinkClr xmlns:ahyp="http://schemas.microsoft.com/office/drawing/2018/hyperlinkcolor" val="tx"/>
@@ -7073,9 +7313,9 @@
                 <a:solidFill>
                   <a:srgbClr val="1D7A50"/>
                 </a:solidFill>
-                <a:latin typeface="Be Vietnam Pro" pitchFamily="34" charset="0"/>
-                <a:ea typeface="Be Vietnam Pro" pitchFamily="34" charset="-122"/>
-                <a:cs typeface="Be Vietnam Pro" pitchFamily="34" charset="-120"/>
+                <a:latin typeface="Arial" pitchFamily="34" charset="0"/>
+                <a:ea typeface="Arial" pitchFamily="34" charset="-122"/>
+                <a:cs typeface="Arial" pitchFamily="34" charset="-120"/>
               </a:rPr>
               <a:t>THE PROBLEM</a:t>
             </a:r>
@@ -7119,9 +7359,9 @@
                 <a:solidFill>
                   <a:srgbClr val="13261D"/>
                 </a:solidFill>
-                <a:latin typeface="Be Vietnam Pro" pitchFamily="34" charset="0"/>
-                <a:ea typeface="Be Vietnam Pro" pitchFamily="34" charset="-122"/>
-                <a:cs typeface="Be Vietnam Pro" pitchFamily="34" charset="-120"/>
+                <a:latin typeface="Arial" pitchFamily="34" charset="0"/>
+                <a:ea typeface="Arial" pitchFamily="34" charset="-122"/>
+                <a:cs typeface="Arial" pitchFamily="34" charset="-120"/>
               </a:rPr>
               <a:t>Checking traps by hand is slow and always behind the pests</a:t>
             </a:r>
@@ -7213,9 +7453,9 @@
                 <a:solidFill>
                   <a:srgbClr val="13261D"/>
                 </a:solidFill>
-                <a:latin typeface="Be Vietnam Pro" pitchFamily="34" charset="0"/>
-                <a:ea typeface="Be Vietnam Pro" pitchFamily="34" charset="-122"/>
-                <a:cs typeface="Be Vietnam Pro" pitchFamily="34" charset="-120"/>
+                <a:latin typeface="Arial" pitchFamily="34" charset="0"/>
+                <a:ea typeface="Arial" pitchFamily="34" charset="-122"/>
+                <a:cs typeface="Arial" pitchFamily="34" charset="-120"/>
               </a:rPr>
               <a:t>Walking every trap, counting by eye</a:t>
             </a:r>
@@ -7257,9 +7497,9 @@
                 <a:solidFill>
                   <a:srgbClr val="4A5A50"/>
                 </a:solidFill>
-                <a:latin typeface="Be Vietnam Pro" pitchFamily="34" charset="0"/>
-                <a:ea typeface="Be Vietnam Pro" pitchFamily="34" charset="-122"/>
-                <a:cs typeface="Be Vietnam Pro" pitchFamily="34" charset="-120"/>
+                <a:latin typeface="Arial" pitchFamily="34" charset="0"/>
+                <a:ea typeface="Arial" pitchFamily="34" charset="-122"/>
+                <a:cs typeface="Arial" pitchFamily="34" charset="-120"/>
               </a:rPr>
               <a:t>Each round takes hours of labour, and the count depends on who does it.</a:t>
             </a:r>
@@ -7351,9 +7591,9 @@
                 <a:solidFill>
                   <a:srgbClr val="13261D"/>
                 </a:solidFill>
-                <a:latin typeface="Be Vietnam Pro" pitchFamily="34" charset="0"/>
-                <a:ea typeface="Be Vietnam Pro" pitchFamily="34" charset="-122"/>
-                <a:cs typeface="Be Vietnam Pro" pitchFamily="34" charset="-120"/>
+                <a:latin typeface="Arial" pitchFamily="34" charset="0"/>
+                <a:ea typeface="Arial" pitchFamily="34" charset="-122"/>
+                <a:cs typeface="Arial" pitchFamily="34" charset="-120"/>
               </a:rPr>
               <a:t>Scattered records</a:t>
             </a:r>
@@ -7395,9 +7635,9 @@
                 <a:solidFill>
                   <a:srgbClr val="4A5A50"/>
                 </a:solidFill>
-                <a:latin typeface="Be Vietnam Pro" pitchFamily="34" charset="0"/>
-                <a:ea typeface="Be Vietnam Pro" pitchFamily="34" charset="-122"/>
-                <a:cs typeface="Be Vietnam Pro" pitchFamily="34" charset="-120"/>
+                <a:latin typeface="Arial" pitchFamily="34" charset="0"/>
+                <a:ea typeface="Arial" pitchFamily="34" charset="-122"/>
+                <a:cs typeface="Arial" pitchFamily="34" charset="-120"/>
               </a:rPr>
               <a:t>Notes on paper are hard to compare across traps, plots and weeks.</a:t>
             </a:r>
@@ -7489,9 +7729,9 @@
                 <a:solidFill>
                   <a:srgbClr val="13261D"/>
                 </a:solidFill>
-                <a:latin typeface="Be Vietnam Pro" pitchFamily="34" charset="0"/>
-                <a:ea typeface="Be Vietnam Pro" pitchFamily="34" charset="-122"/>
-                <a:cs typeface="Be Vietnam Pro" pitchFamily="34" charset="-120"/>
+                <a:latin typeface="Arial" pitchFamily="34" charset="0"/>
+                <a:ea typeface="Arial" pitchFamily="34" charset="-122"/>
+                <a:cs typeface="Arial" pitchFamily="34" charset="-120"/>
               </a:rPr>
               <a:t>Spotted too late</a:t>
             </a:r>
@@ -7533,9 +7773,9 @@
                 <a:solidFill>
                   <a:srgbClr val="4A5A50"/>
                 </a:solidFill>
-                <a:latin typeface="Be Vietnam Pro" pitchFamily="34" charset="0"/>
-                <a:ea typeface="Be Vietnam Pro" pitchFamily="34" charset="-122"/>
-                <a:cs typeface="Be Vietnam Pro" pitchFamily="34" charset="-120"/>
+                <a:latin typeface="Arial" pitchFamily="34" charset="0"/>
+                <a:ea typeface="Arial" pitchFamily="34" charset="-122"/>
+                <a:cs typeface="Arial" pitchFamily="34" charset="-120"/>
               </a:rPr>
               <a:t>By the time numbers look high, the outbreak has started and costs more to treat.</a:t>
             </a:r>
@@ -7577,9 +7817,9 @@
                 <a:solidFill>
                   <a:srgbClr val="6B7B70"/>
                 </a:solidFill>
-                <a:latin typeface="Be Vietnam Pro" pitchFamily="34" charset="0"/>
-                <a:ea typeface="Be Vietnam Pro" pitchFamily="34" charset="-122"/>
-                <a:cs typeface="Be Vietnam Pro" pitchFamily="34" charset="-120"/>
+                <a:latin typeface="Arial" pitchFamily="34" charset="0"/>
+                <a:ea typeface="Arial" pitchFamily="34" charset="-122"/>
+                <a:cs typeface="Arial" pitchFamily="34" charset="-120"/>
               </a:rPr>
               <a:t>FlyBot · 2</a:t>
             </a:r>
@@ -7653,9 +7893,9 @@
                 <a:solidFill>
                   <a:srgbClr val="1D7A50"/>
                 </a:solidFill>
-                <a:latin typeface="Be Vietnam Pro" pitchFamily="34" charset="0"/>
-                <a:ea typeface="Be Vietnam Pro" pitchFamily="34" charset="-122"/>
-                <a:cs typeface="Be Vietnam Pro" pitchFamily="34" charset="-120"/>
+                <a:latin typeface="Arial" pitchFamily="34" charset="0"/>
+                <a:ea typeface="Arial" pitchFamily="34" charset="-122"/>
+                <a:cs typeface="Arial" pitchFamily="34" charset="-120"/>
               </a:rPr>
               <a:t>HOW IT WORKS</a:t>
             </a:r>
@@ -7699,9 +7939,9 @@
                 <a:solidFill>
                   <a:srgbClr val="13261D"/>
                 </a:solidFill>
-                <a:latin typeface="Be Vietnam Pro" pitchFamily="34" charset="0"/>
-                <a:ea typeface="Be Vietnam Pro" pitchFamily="34" charset="-122"/>
-                <a:cs typeface="Be Vietnam Pro" pitchFamily="34" charset="-120"/>
+                <a:latin typeface="Arial" pitchFamily="34" charset="0"/>
+                <a:ea typeface="Arial" pitchFamily="34" charset="-122"/>
+                <a:cs typeface="Arial" pitchFamily="34" charset="-120"/>
               </a:rPr>
               <a:t>From trap card to decision, with no counting by hand</a:t>
             </a:r>
@@ -7800,9 +8040,9 @@
                 <a:solidFill>
                   <a:srgbClr val="13261D"/>
                 </a:solidFill>
-                <a:latin typeface="Be Vietnam Pro" pitchFamily="34" charset="0"/>
-                <a:ea typeface="Be Vietnam Pro" pitchFamily="34" charset="-122"/>
-                <a:cs typeface="Be Vietnam Pro" pitchFamily="34" charset="-120"/>
+                <a:latin typeface="Arial" pitchFamily="34" charset="0"/>
+                <a:ea typeface="Arial" pitchFamily="34" charset="-122"/>
+                <a:cs typeface="Arial" pitchFamily="34" charset="-120"/>
               </a:rPr>
               <a:t>1</a:t>
             </a:r>
@@ -7844,9 +8084,9 @@
                 <a:solidFill>
                   <a:srgbClr val="13261D"/>
                 </a:solidFill>
-                <a:latin typeface="Be Vietnam Pro" pitchFamily="34" charset="0"/>
-                <a:ea typeface="Be Vietnam Pro" pitchFamily="34" charset="-122"/>
-                <a:cs typeface="Be Vietnam Pro" pitchFamily="34" charset="-120"/>
+                <a:latin typeface="Arial" pitchFamily="34" charset="0"/>
+                <a:ea typeface="Arial" pitchFamily="34" charset="-122"/>
+                <a:cs typeface="Arial" pitchFamily="34" charset="-120"/>
               </a:rPr>
               <a:t>The camera shoots the trap</a:t>
             </a:r>
@@ -7888,9 +8128,9 @@
                 <a:solidFill>
                   <a:srgbClr val="4A5A50"/>
                 </a:solidFill>
-                <a:latin typeface="Be Vietnam Pro" pitchFamily="34" charset="0"/>
-                <a:ea typeface="Be Vietnam Pro" pitchFamily="34" charset="-122"/>
-                <a:cs typeface="Be Vietnam Pro" pitchFamily="34" charset="-120"/>
+                <a:latin typeface="Arial" pitchFamily="34" charset="0"/>
+                <a:ea typeface="Arial" pitchFamily="34" charset="-122"/>
+                <a:cs typeface="Arial" pitchFamily="34" charset="-120"/>
               </a:rPr>
               <a:t>An EZVIZ camera takes photos on each trap's own schedule, daytime only if you like.</a:t>
             </a:r>
@@ -8012,9 +8252,9 @@
                 <a:solidFill>
                   <a:srgbClr val="13261D"/>
                 </a:solidFill>
-                <a:latin typeface="Be Vietnam Pro" pitchFamily="34" charset="0"/>
-                <a:ea typeface="Be Vietnam Pro" pitchFamily="34" charset="-122"/>
-                <a:cs typeface="Be Vietnam Pro" pitchFamily="34" charset="-120"/>
+                <a:latin typeface="Arial" pitchFamily="34" charset="0"/>
+                <a:ea typeface="Arial" pitchFamily="34" charset="-122"/>
+                <a:cs typeface="Arial" pitchFamily="34" charset="-120"/>
               </a:rPr>
               <a:t>2</a:t>
             </a:r>
@@ -8056,9 +8296,9 @@
                 <a:solidFill>
                   <a:srgbClr val="13261D"/>
                 </a:solidFill>
-                <a:latin typeface="Be Vietnam Pro" pitchFamily="34" charset="0"/>
-                <a:ea typeface="Be Vietnam Pro" pitchFamily="34" charset="-122"/>
-                <a:cs typeface="Be Vietnam Pro" pitchFamily="34" charset="-120"/>
+                <a:latin typeface="Arial" pitchFamily="34" charset="0"/>
+                <a:ea typeface="Arial" pitchFamily="34" charset="-122"/>
+                <a:cs typeface="Arial" pitchFamily="34" charset="-120"/>
               </a:rPr>
               <a:t>The AI finds and counts</a:t>
             </a:r>
@@ -8100,9 +8340,9 @@
                 <a:solidFill>
                   <a:srgbClr val="4A5A50"/>
                 </a:solidFill>
-                <a:latin typeface="Be Vietnam Pro" pitchFamily="34" charset="0"/>
-                <a:ea typeface="Be Vietnam Pro" pitchFamily="34" charset="-122"/>
-                <a:cs typeface="Be Vietnam Pro" pitchFamily="34" charset="-120"/>
+                <a:latin typeface="Arial" pitchFamily="34" charset="0"/>
+                <a:ea typeface="Arial" pitchFamily="34" charset="-122"/>
+                <a:cs typeface="Arial" pitchFamily="34" charset="-120"/>
               </a:rPr>
               <a:t>It boxes every insect in the photo, with its species and confidence.</a:t>
             </a:r>
@@ -8224,9 +8464,9 @@
                 <a:solidFill>
                   <a:srgbClr val="13261D"/>
                 </a:solidFill>
-                <a:latin typeface="Be Vietnam Pro" pitchFamily="34" charset="0"/>
-                <a:ea typeface="Be Vietnam Pro" pitchFamily="34" charset="-122"/>
-                <a:cs typeface="Be Vietnam Pro" pitchFamily="34" charset="-120"/>
+                <a:latin typeface="Arial" pitchFamily="34" charset="0"/>
+                <a:ea typeface="Arial" pitchFamily="34" charset="-122"/>
+                <a:cs typeface="Arial" pitchFamily="34" charset="-120"/>
               </a:rPr>
               <a:t>3</a:t>
             </a:r>
@@ -8268,9 +8508,9 @@
                 <a:solidFill>
                   <a:srgbClr val="13261D"/>
                 </a:solidFill>
-                <a:latin typeface="Be Vietnam Pro" pitchFamily="34" charset="0"/>
-                <a:ea typeface="Be Vietnam Pro" pitchFamily="34" charset="-122"/>
-                <a:cs typeface="Be Vietnam Pro" pitchFamily="34" charset="-120"/>
+                <a:latin typeface="Arial" pitchFamily="34" charset="0"/>
+                <a:ea typeface="Arial" pitchFamily="34" charset="-122"/>
+                <a:cs typeface="Arial" pitchFamily="34" charset="-120"/>
               </a:rPr>
               <a:t>Daily catches</a:t>
             </a:r>
@@ -8312,9 +8552,9 @@
                 <a:solidFill>
                   <a:srgbClr val="4A5A50"/>
                 </a:solidFill>
-                <a:latin typeface="Be Vietnam Pro" pitchFamily="34" charset="0"/>
-                <a:ea typeface="Be Vietnam Pro" pitchFamily="34" charset="-122"/>
-                <a:cs typeface="Be Vietnam Pro" pitchFamily="34" charset="-120"/>
+                <a:latin typeface="Arial" pitchFamily="34" charset="0"/>
+                <a:ea typeface="Arial" pitchFamily="34" charset="-122"/>
+                <a:cs typeface="Arial" pitchFamily="34" charset="-120"/>
               </a:rPr>
               <a:t>New insects per day and flies per trap per day, to compare.</a:t>
             </a:r>
@@ -8431,9 +8671,9 @@
                 <a:solidFill>
                   <a:srgbClr val="13261D"/>
                 </a:solidFill>
-                <a:latin typeface="Be Vietnam Pro" pitchFamily="34" charset="0"/>
-                <a:ea typeface="Be Vietnam Pro" pitchFamily="34" charset="-122"/>
-                <a:cs typeface="Be Vietnam Pro" pitchFamily="34" charset="-120"/>
+                <a:latin typeface="Arial" pitchFamily="34" charset="0"/>
+                <a:ea typeface="Arial" pitchFamily="34" charset="-122"/>
+                <a:cs typeface="Arial" pitchFamily="34" charset="-120"/>
               </a:rPr>
               <a:t>4</a:t>
             </a:r>
@@ -8475,9 +8715,9 @@
                 <a:solidFill>
                   <a:srgbClr val="F5F7F1"/>
                 </a:solidFill>
-                <a:latin typeface="Be Vietnam Pro" pitchFamily="34" charset="0"/>
-                <a:ea typeface="Be Vietnam Pro" pitchFamily="34" charset="-122"/>
-                <a:cs typeface="Be Vietnam Pro" pitchFamily="34" charset="-120"/>
+                <a:latin typeface="Arial" pitchFamily="34" charset="0"/>
+                <a:ea typeface="Arial" pitchFamily="34" charset="-122"/>
+                <a:cs typeface="Arial" pitchFamily="34" charset="-120"/>
               </a:rPr>
               <a:t>Alerts and reports</a:t>
             </a:r>
@@ -8519,9 +8759,9 @@
                 <a:solidFill>
                   <a:srgbClr val="BFD3C6"/>
                 </a:solidFill>
-                <a:latin typeface="Be Vietnam Pro" pitchFamily="34" charset="0"/>
-                <a:ea typeface="Be Vietnam Pro" pitchFamily="34" charset="-122"/>
-                <a:cs typeface="Be Vietnam Pro" pitchFamily="34" charset="-120"/>
+                <a:latin typeface="Arial" pitchFamily="34" charset="0"/>
+                <a:ea typeface="Arial" pitchFamily="34" charset="-122"/>
+                <a:cs typeface="Arial" pitchFamily="34" charset="-120"/>
               </a:rPr>
               <a:t>An alert as soon as a threshold is reached; reports on a schedule.</a:t>
             </a:r>
@@ -8563,9 +8803,9 @@
                 <a:solidFill>
                   <a:srgbClr val="6B7B70"/>
                 </a:solidFill>
-                <a:latin typeface="Be Vietnam Pro" pitchFamily="34" charset="0"/>
-                <a:ea typeface="Be Vietnam Pro" pitchFamily="34" charset="-122"/>
-                <a:cs typeface="Be Vietnam Pro" pitchFamily="34" charset="-120"/>
+                <a:latin typeface="Arial" pitchFamily="34" charset="0"/>
+                <a:ea typeface="Arial" pitchFamily="34" charset="-122"/>
+                <a:cs typeface="Arial" pitchFamily="34" charset="-120"/>
               </a:rPr>
               <a:t>FlyBot · 3</a:t>
             </a:r>
@@ -8639,9 +8879,9 @@
                 <a:solidFill>
                   <a:srgbClr val="F2C230"/>
                 </a:solidFill>
-                <a:latin typeface="Be Vietnam Pro" pitchFamily="34" charset="0"/>
-                <a:ea typeface="Be Vietnam Pro" pitchFamily="34" charset="-122"/>
-                <a:cs typeface="Be Vietnam Pro" pitchFamily="34" charset="-120"/>
+                <a:latin typeface="Arial" pitchFamily="34" charset="0"/>
+                <a:ea typeface="Arial" pitchFamily="34" charset="-122"/>
+                <a:cs typeface="Arial" pitchFamily="34" charset="-120"/>
               </a:rPr>
               <a:t>PRODUCT TOUR</a:t>
             </a:r>
@@ -8685,9 +8925,9 @@
                 <a:solidFill>
                   <a:srgbClr val="F5F7F1"/>
                 </a:solidFill>
-                <a:latin typeface="Be Vietnam Pro" pitchFamily="34" charset="0"/>
-                <a:ea typeface="Be Vietnam Pro" pitchFamily="34" charset="-122"/>
-                <a:cs typeface="Be Vietnam Pro" pitchFamily="34" charset="-120"/>
+                <a:latin typeface="Arial" pitchFamily="34" charset="0"/>
+                <a:ea typeface="Arial" pitchFamily="34" charset="-122"/>
+                <a:cs typeface="Arial" pitchFamily="34" charset="-120"/>
               </a:rPr>
               <a:t>FlyBot in 82 seconds</a:t>
             </a:r>
@@ -8729,9 +8969,9 @@
                 <a:solidFill>
                   <a:srgbClr val="BFD3C6"/>
                 </a:solidFill>
-                <a:latin typeface="Be Vietnam Pro" pitchFamily="34" charset="0"/>
-                <a:ea typeface="Be Vietnam Pro" pitchFamily="34" charset="-122"/>
-                <a:cs typeface="Be Vietnam Pro" pitchFamily="34" charset="-120"/>
+                <a:latin typeface="Arial" pitchFamily="34" charset="0"/>
+                <a:ea typeface="Arial" pitchFamily="34" charset="-122"/>
+                <a:cs typeface="Arial" pitchFamily="34" charset="-120"/>
               </a:rPr>
               <a:t>A walk through the app: overview, AI detection, cameras, analytics, reports, the FlyBot assistant and the quick tour.</a:t>
             </a:r>
@@ -8773,9 +9013,9 @@
                 <a:solidFill>
                   <a:srgbClr val="F2C230"/>
                 </a:solidFill>
-                <a:latin typeface="Be Vietnam Pro" pitchFamily="34" charset="0"/>
-                <a:ea typeface="Be Vietnam Pro" pitchFamily="34" charset="-122"/>
-                <a:cs typeface="Be Vietnam Pro" pitchFamily="34" charset="-120"/>
+                <a:latin typeface="Arial" pitchFamily="34" charset="0"/>
+                <a:ea typeface="Arial" pitchFamily="34" charset="-122"/>
+                <a:cs typeface="Arial" pitchFamily="34" charset="-120"/>
               </a:rPr>
               <a:t>▶ </a:t>
             </a:r>
@@ -8784,9 +9024,9 @@
                 <a:solidFill>
                   <a:srgbClr val="F2C230"/>
                 </a:solidFill>
-                <a:latin typeface="Be Vietnam Pro" pitchFamily="34" charset="0"/>
-                <a:ea typeface="Be Vietnam Pro" pitchFamily="34" charset="-122"/>
-                <a:cs typeface="Be Vietnam Pro" pitchFamily="34" charset="-120"/>
+                <a:latin typeface="Arial" pitchFamily="34" charset="0"/>
+                <a:ea typeface="Arial" pitchFamily="34" charset="-122"/>
+                <a:cs typeface="Arial" pitchFamily="34" charset="-120"/>
                 <a:hlinkClick r:id="rId1" invalidUrl="" action="" tgtFrame="" tooltip="" history="1" highlightClick="0" endSnd="0">
                   <a:extLst>
                     <a:ext uri="{A12FA001-AC4F-418D-AE19-62706E023703}">
@@ -8835,9 +9075,9 @@
                 <a:solidFill>
                   <a:srgbClr val="8FA898"/>
                 </a:solidFill>
-                <a:latin typeface="Be Vietnam Pro" pitchFamily="34" charset="0"/>
-                <a:ea typeface="Be Vietnam Pro" pitchFamily="34" charset="-122"/>
-                <a:cs typeface="Be Vietnam Pro" pitchFamily="34" charset="-120"/>
+                <a:latin typeface="Arial" pitchFamily="34" charset="0"/>
+                <a:ea typeface="Arial" pitchFamily="34" charset="-122"/>
+                <a:cs typeface="Arial" pitchFamily="34" charset="-120"/>
               </a:rPr>
               <a:t>It plays by itself when presented. In the PDF or PowerPoint file, click the video or the link above to watch the latest version on the website.</a:t>
             </a:r>
@@ -9012,9 +9252,9 @@
                 <a:solidFill>
                   <a:srgbClr val="8FA898"/>
                 </a:solidFill>
-                <a:latin typeface="Be Vietnam Pro" pitchFamily="34" charset="0"/>
-                <a:ea typeface="Be Vietnam Pro" pitchFamily="34" charset="-122"/>
-                <a:cs typeface="Be Vietnam Pro" pitchFamily="34" charset="-120"/>
+                <a:latin typeface="Arial" pitchFamily="34" charset="0"/>
+                <a:ea typeface="Arial" pitchFamily="34" charset="-122"/>
+                <a:cs typeface="Arial" pitchFamily="34" charset="-120"/>
               </a:rPr>
               <a:t>FlyBot · 4</a:t>
             </a:r>
@@ -9088,9 +9328,9 @@
                 <a:solidFill>
                   <a:srgbClr val="1D7A50"/>
                 </a:solidFill>
-                <a:latin typeface="Be Vietnam Pro" pitchFamily="34" charset="0"/>
-                <a:ea typeface="Be Vietnam Pro" pitchFamily="34" charset="-122"/>
-                <a:cs typeface="Be Vietnam Pro" pitchFamily="34" charset="-120"/>
+                <a:latin typeface="Arial" pitchFamily="34" charset="0"/>
+                <a:ea typeface="Arial" pitchFamily="34" charset="-122"/>
+                <a:cs typeface="Arial" pitchFamily="34" charset="-120"/>
               </a:rPr>
               <a:t>OVERVIEW</a:t>
             </a:r>
@@ -9134,9 +9374,9 @@
                 <a:solidFill>
                   <a:srgbClr val="13261D"/>
                 </a:solidFill>
-                <a:latin typeface="Be Vietnam Pro" pitchFamily="34" charset="0"/>
-                <a:ea typeface="Be Vietnam Pro" pitchFamily="34" charset="-122"/>
-                <a:cs typeface="Be Vietnam Pro" pitchFamily="34" charset="-120"/>
+                <a:latin typeface="Arial" pitchFamily="34" charset="0"/>
+                <a:ea typeface="Arial" pitchFamily="34" charset="-122"/>
+                <a:cs typeface="Arial" pitchFamily="34" charset="-120"/>
               </a:rPr>
               <a:t>The whole farm on one screen</a:t>
             </a:r>
@@ -9257,9 +9497,9 @@
                 <a:solidFill>
                   <a:srgbClr val="13261D"/>
                 </a:solidFill>
-                <a:latin typeface="Be Vietnam Pro" pitchFamily="34" charset="0"/>
-                <a:ea typeface="Be Vietnam Pro" pitchFamily="34" charset="-122"/>
-                <a:cs typeface="Be Vietnam Pro" pitchFamily="34" charset="-120"/>
+                <a:latin typeface="Arial" pitchFamily="34" charset="0"/>
+                <a:ea typeface="Arial" pitchFamily="34" charset="-122"/>
+                <a:cs typeface="Arial" pitchFamily="34" charset="-120"/>
               </a:rPr>
               <a:t>Catches today</a:t>
             </a:r>
@@ -9301,9 +9541,9 @@
                 <a:solidFill>
                   <a:srgbClr val="4A5A50"/>
                 </a:solidFill>
-                <a:latin typeface="Be Vietnam Pro" pitchFamily="34" charset="0"/>
-                <a:ea typeface="Be Vietnam Pro" pitchFamily="34" charset="-122"/>
-                <a:cs typeface="Be Vietnam Pro" pitchFamily="34" charset="-120"/>
+                <a:latin typeface="Arial" pitchFamily="34" charset="0"/>
+                <a:ea typeface="Arial" pitchFamily="34" charset="-122"/>
+                <a:cs typeface="Arial" pitchFamily="34" charset="-120"/>
               </a:rPr>
               <a:t>New insects, not the running total on the sticky card.</a:t>
             </a:r>
@@ -9345,9 +9585,9 @@
                 <a:solidFill>
                   <a:srgbClr val="13261D"/>
                 </a:solidFill>
-                <a:latin typeface="Be Vietnam Pro" pitchFamily="34" charset="0"/>
-                <a:ea typeface="Be Vietnam Pro" pitchFamily="34" charset="-122"/>
-                <a:cs typeface="Be Vietnam Pro" pitchFamily="34" charset="-120"/>
+                <a:latin typeface="Arial" pitchFamily="34" charset="0"/>
+                <a:ea typeface="Arial" pitchFamily="34" charset="-122"/>
+                <a:cs typeface="Arial" pitchFamily="34" charset="-120"/>
               </a:rPr>
               <a:t>Flies per trap per day</a:t>
             </a:r>
@@ -9389,9 +9629,9 @@
                 <a:solidFill>
                   <a:srgbClr val="4A5A50"/>
                 </a:solidFill>
-                <a:latin typeface="Be Vietnam Pro" pitchFamily="34" charset="0"/>
-                <a:ea typeface="Be Vietnam Pro" pitchFamily="34" charset="-122"/>
-                <a:cs typeface="Be Vietnam Pro" pitchFamily="34" charset="-120"/>
+                <a:latin typeface="Arial" pitchFamily="34" charset="0"/>
+                <a:ea typeface="Arial" pitchFamily="34" charset="-122"/>
+                <a:cs typeface="Arial" pitchFamily="34" charset="-120"/>
               </a:rPr>
               <a:t>The standard figure to compare traps and weeks.</a:t>
             </a:r>
@@ -9433,9 +9673,9 @@
                 <a:solidFill>
                   <a:srgbClr val="13261D"/>
                 </a:solidFill>
-                <a:latin typeface="Be Vietnam Pro" pitchFamily="34" charset="0"/>
-                <a:ea typeface="Be Vietnam Pro" pitchFamily="34" charset="-122"/>
-                <a:cs typeface="Be Vietnam Pro" pitchFamily="34" charset="-120"/>
+                <a:latin typeface="Arial" pitchFamily="34" charset="0"/>
+                <a:ea typeface="Arial" pitchFamily="34" charset="-122"/>
+                <a:cs typeface="Arial" pitchFamily="34" charset="-120"/>
               </a:rPr>
               <a:t>Risk for every trap</a:t>
             </a:r>
@@ -9477,9 +9717,9 @@
                 <a:solidFill>
                   <a:srgbClr val="4A5A50"/>
                 </a:solidFill>
-                <a:latin typeface="Be Vietnam Pro" pitchFamily="34" charset="0"/>
-                <a:ea typeface="Be Vietnam Pro" pitchFamily="34" charset="-122"/>
-                <a:cs typeface="Be Vietnam Pro" pitchFamily="34" charset="-120"/>
+                <a:latin typeface="Arial" pitchFamily="34" charset="0"/>
+                <a:ea typeface="Arial" pitchFamily="34" charset="-122"/>
+                <a:cs typeface="Arial" pitchFamily="34" charset="-120"/>
               </a:rPr>
               <a:t>Against each trap's own threshold, with its latest AI photo.</a:t>
             </a:r>
@@ -9521,9 +9761,9 @@
                 <a:solidFill>
                   <a:srgbClr val="6B7B70"/>
                 </a:solidFill>
-                <a:latin typeface="Be Vietnam Pro" pitchFamily="34" charset="0"/>
-                <a:ea typeface="Be Vietnam Pro" pitchFamily="34" charset="-122"/>
-                <a:cs typeface="Be Vietnam Pro" pitchFamily="34" charset="-120"/>
+                <a:latin typeface="Arial" pitchFamily="34" charset="0"/>
+                <a:ea typeface="Arial" pitchFamily="34" charset="-122"/>
+                <a:cs typeface="Arial" pitchFamily="34" charset="-120"/>
               </a:rPr>
               <a:t>FlyBot · 5</a:t>
             </a:r>
@@ -9597,9 +9837,9 @@
                 <a:solidFill>
                   <a:srgbClr val="1D7A50"/>
                 </a:solidFill>
-                <a:latin typeface="Be Vietnam Pro" pitchFamily="34" charset="0"/>
-                <a:ea typeface="Be Vietnam Pro" pitchFamily="34" charset="-122"/>
-                <a:cs typeface="Be Vietnam Pro" pitchFamily="34" charset="-120"/>
+                <a:latin typeface="Arial" pitchFamily="34" charset="0"/>
+                <a:ea typeface="Arial" pitchFamily="34" charset="-122"/>
+                <a:cs typeface="Arial" pitchFamily="34" charset="-120"/>
               </a:rPr>
               <a:t>AI DETECTION</a:t>
             </a:r>
@@ -9643,9 +9883,9 @@
                 <a:solidFill>
                   <a:srgbClr val="13261D"/>
                 </a:solidFill>
-                <a:latin typeface="Be Vietnam Pro" pitchFamily="34" charset="0"/>
-                <a:ea typeface="Be Vietnam Pro" pitchFamily="34" charset="-122"/>
-                <a:cs typeface="Be Vietnam Pro" pitchFamily="34" charset="-120"/>
+                <a:latin typeface="Arial" pitchFamily="34" charset="0"/>
+                <a:ea typeface="Arial" pitchFamily="34" charset="-122"/>
+                <a:cs typeface="Arial" pitchFamily="34" charset="-120"/>
               </a:rPr>
               <a:t>Every insect boxed and named</a:t>
             </a:r>
@@ -9766,9 +10006,9 @@
                 <a:solidFill>
                   <a:srgbClr val="13261D"/>
                 </a:solidFill>
-                <a:latin typeface="Be Vietnam Pro" pitchFamily="34" charset="0"/>
-                <a:ea typeface="Be Vietnam Pro" pitchFamily="34" charset="-122"/>
-                <a:cs typeface="Be Vietnam Pro" pitchFamily="34" charset="-120"/>
+                <a:latin typeface="Arial" pitchFamily="34" charset="0"/>
+                <a:ea typeface="Arial" pitchFamily="34" charset="-122"/>
+                <a:cs typeface="Arial" pitchFamily="34" charset="-120"/>
               </a:rPr>
               <a:t>Boxes and species</a:t>
             </a:r>
@@ -9810,9 +10050,9 @@
                 <a:solidFill>
                   <a:srgbClr val="4A5A50"/>
                 </a:solidFill>
-                <a:latin typeface="Be Vietnam Pro" pitchFamily="34" charset="0"/>
-                <a:ea typeface="Be Vietnam Pro" pitchFamily="34" charset="-122"/>
-                <a:cs typeface="Be Vietnam Pro" pitchFamily="34" charset="-120"/>
+                <a:latin typeface="Arial" pitchFamily="34" charset="0"/>
+                <a:ea typeface="Arial" pitchFamily="34" charset="-122"/>
+                <a:cs typeface="Arial" pitchFamily="34" charset="-120"/>
               </a:rPr>
               <a:t>Each insect gets a box, a species and a confidence; counts by species.</a:t>
             </a:r>
@@ -9828,7 +10068,7 @@
         </p:nvSpPr>
         <p:spPr>
           <a:xfrm>
-            <a:off x="7569200" y="2949575"/>
+            <a:off x="7569200" y="2898775"/>
             <a:ext cx="3924300" cy="279400"/>
           </a:xfrm>
           <a:prstGeom prst="rect">
@@ -9854,9 +10094,97 @@
                 <a:solidFill>
                   <a:srgbClr val="13261D"/>
                 </a:solidFill>
-                <a:latin typeface="Be Vietnam Pro" pitchFamily="34" charset="0"/>
-                <a:ea typeface="Be Vietnam Pro" pitchFamily="34" charset="-122"/>
-                <a:cs typeface="Be Vietnam Pro" pitchFamily="34" charset="-120"/>
+                <a:latin typeface="Arial" pitchFamily="34" charset="0"/>
+                <a:ea typeface="Arial" pitchFamily="34" charset="-122"/>
+                <a:cs typeface="Arial" pitchFamily="34" charset="-120"/>
+              </a:rPr>
+              <a:t>Measured accuracy</a:t>
+            </a:r>
+            <a:endParaRPr lang="en-US" sz="1600" dirty="0"/>
+          </a:p>
+        </p:txBody>
+      </p:sp>
+      <p:sp>
+        <p:nvSpPr>
+          <p:cNvPr id="10" name="Text 7"/>
+          <p:cNvSpPr/>
+          <p:nvPr/>
+        </p:nvSpPr>
+        <p:spPr>
+          <a:xfrm>
+            <a:off x="7569200" y="3203575"/>
+            <a:ext cx="3924300" cy="520700"/>
+          </a:xfrm>
+          <a:prstGeom prst="rect">
+            <a:avLst/>
+          </a:prstGeom>
+          <a:noFill/>
+          <a:ln/>
+        </p:spPr>
+        <p:txBody>
+          <a:bodyPr wrap="square" lIns="0" tIns="0" rIns="0" bIns="0" rtlCol="0" anchor="t">
+            <a:normAutofit/>
+          </a:bodyPr>
+          <a:lstStyle/>
+          <a:p>
+            <a:pPr algn="l" indent="0" marL="0">
+              <a:lnSpc>
+                <a:spcPts val="1950"/>
+              </a:lnSpc>
+              <a:buNone/>
+            </a:pPr>
+            <a:r>
+              <a:rPr lang="en-US" sz="1300" dirty="0">
+                <a:solidFill>
+                  <a:srgbClr val="4A5A50"/>
+                </a:solidFill>
+                <a:latin typeface="Arial" pitchFamily="34" charset="0"/>
+                <a:ea typeface="Arial" pitchFamily="34" charset="-122"/>
+                <a:cs typeface="Arial" pitchFamily="34" charset="-120"/>
+              </a:rPr>
+              <a:t>On 76 test photos: finds 92 of 100 flies; 93 of 100 boxes are fruit flies.</a:t>
+            </a:r>
+            <a:endParaRPr lang="en-US" sz="1300" dirty="0"/>
+          </a:p>
+        </p:txBody>
+      </p:sp>
+      <p:sp>
+        <p:nvSpPr>
+          <p:cNvPr id="11" name="Text 8"/>
+          <p:cNvSpPr/>
+          <p:nvPr/>
+        </p:nvSpPr>
+        <p:spPr>
+          <a:xfrm>
+            <a:off x="7569200" y="3902075"/>
+            <a:ext cx="3924300" cy="279400"/>
+          </a:xfrm>
+          <a:prstGeom prst="rect">
+            <a:avLst/>
+          </a:prstGeom>
+          <a:noFill/>
+          <a:ln/>
+        </p:spPr>
+        <p:txBody>
+          <a:bodyPr wrap="square" lIns="0" tIns="0" rIns="0" bIns="0" rtlCol="0" anchor="t">
+            <a:normAutofit/>
+          </a:bodyPr>
+          <a:lstStyle/>
+          <a:p>
+            <a:pPr algn="l" indent="0" marL="0">
+              <a:lnSpc>
+                <a:spcPts val="2000"/>
+              </a:lnSpc>
+              <a:buNone/>
+            </a:pPr>
+            <a:r>
+              <a:rPr lang="en-US" sz="1600" b="1" dirty="0">
+                <a:solidFill>
+                  <a:srgbClr val="13261D"/>
+                </a:solidFill>
+                <a:latin typeface="Arial" pitchFamily="34" charset="0"/>
+                <a:ea typeface="Arial" pitchFamily="34" charset="-122"/>
+                <a:cs typeface="Arial" pitchFamily="34" charset="-120"/>
               </a:rPr>
               <a:t>People review</a:t>
             </a:r>
@@ -9866,13 +10194,13 @@
       </p:sp>
       <p:sp>
         <p:nvSpPr>
-          <p:cNvPr id="10" name="Text 7"/>
-          <p:cNvSpPr/>
-          <p:nvPr/>
-        </p:nvSpPr>
-        <p:spPr>
-          <a:xfrm>
-            <a:off x="7569200" y="3254375"/>
+          <p:cNvPr id="12" name="Text 9"/>
+          <p:cNvSpPr/>
+          <p:nvPr/>
+        </p:nvSpPr>
+        <p:spPr>
+          <a:xfrm>
+            <a:off x="7569200" y="4206875"/>
             <a:ext cx="3924300" cy="520700"/>
           </a:xfrm>
           <a:prstGeom prst="rect">
@@ -9898,9 +10226,9 @@
                 <a:solidFill>
                   <a:srgbClr val="4A5A50"/>
                 </a:solidFill>
-                <a:latin typeface="Be Vietnam Pro" pitchFamily="34" charset="0"/>
-                <a:ea typeface="Be Vietnam Pro" pitchFamily="34" charset="-122"/>
-                <a:cs typeface="Be Vietnam Pro" pitchFamily="34" charset="-120"/>
+                <a:latin typeface="Arial" pitchFamily="34" charset="0"/>
+                <a:ea typeface="Arial" pitchFamily="34" charset="-122"/>
+                <a:cs typeface="Arial" pitchFamily="34" charset="-120"/>
               </a:rPr>
               <a:t>Confirm the result or correct the count right on the photo.</a:t>
             </a:r>
@@ -9910,13 +10238,13 @@
       </p:sp>
       <p:sp>
         <p:nvSpPr>
-          <p:cNvPr id="11" name="Text 8"/>
-          <p:cNvSpPr/>
-          <p:nvPr/>
-        </p:nvSpPr>
-        <p:spPr>
-          <a:xfrm>
-            <a:off x="7569200" y="4003675"/>
+          <p:cNvPr id="13" name="Text 10"/>
+          <p:cNvSpPr/>
+          <p:nvPr/>
+        </p:nvSpPr>
+        <p:spPr>
+          <a:xfrm>
+            <a:off x="7569200" y="4905375"/>
             <a:ext cx="3924300" cy="279400"/>
           </a:xfrm>
           <a:prstGeom prst="rect">
@@ -9942,9 +10270,9 @@
                 <a:solidFill>
                   <a:srgbClr val="13261D"/>
                 </a:solidFill>
-                <a:latin typeface="Be Vietnam Pro" pitchFamily="34" charset="0"/>
-                <a:ea typeface="Be Vietnam Pro" pitchFamily="34" charset="-122"/>
-                <a:cs typeface="Be Vietnam Pro" pitchFamily="34" charset="-120"/>
+                <a:latin typeface="Arial" pitchFamily="34" charset="0"/>
+                <a:ea typeface="Arial" pitchFamily="34" charset="-122"/>
+                <a:cs typeface="Arial" pitchFamily="34" charset="-120"/>
               </a:rPr>
               <a:t>An AI that improves</a:t>
             </a:r>
@@ -9954,13 +10282,13 @@
       </p:sp>
       <p:sp>
         <p:nvSpPr>
-          <p:cNvPr id="12" name="Text 9"/>
-          <p:cNvSpPr/>
-          <p:nvPr/>
-        </p:nvSpPr>
-        <p:spPr>
-          <a:xfrm>
-            <a:off x="7569200" y="4308475"/>
+          <p:cNvPr id="14" name="Text 11"/>
+          <p:cNvSpPr/>
+          <p:nvPr/>
+        </p:nvSpPr>
+        <p:spPr>
+          <a:xfrm>
+            <a:off x="7569200" y="5210175"/>
             <a:ext cx="4572000" cy="273050"/>
           </a:xfrm>
           <a:prstGeom prst="rect">
@@ -9986,9 +10314,9 @@
                 <a:solidFill>
                   <a:srgbClr val="4A5A50"/>
                 </a:solidFill>
-                <a:latin typeface="Be Vietnam Pro" pitchFamily="34" charset="0"/>
-                <a:ea typeface="Be Vietnam Pro" pitchFamily="34" charset="-122"/>
-                <a:cs typeface="Be Vietnam Pro" pitchFamily="34" charset="-120"/>
+                <a:latin typeface="Arial" pitchFamily="34" charset="0"/>
+                <a:ea typeface="Arial" pitchFamily="34" charset="-122"/>
+                <a:cs typeface="Arial" pitchFamily="34" charset="-120"/>
               </a:rPr>
               <a:t>Reviewed photos are sent to retrain the model.</a:t>
             </a:r>
@@ -9998,7 +10326,7 @@
       </p:sp>
       <p:sp>
         <p:nvSpPr>
-          <p:cNvPr id="13" name="Text 10"/>
+          <p:cNvPr id="15" name="Text 12"/>
           <p:cNvSpPr/>
           <p:nvPr/>
         </p:nvSpPr>
@@ -10030,9 +10358,9 @@
                 <a:solidFill>
                   <a:srgbClr val="6B7B70"/>
                 </a:solidFill>
-                <a:latin typeface="Be Vietnam Pro" pitchFamily="34" charset="0"/>
-                <a:ea typeface="Be Vietnam Pro" pitchFamily="34" charset="-122"/>
-                <a:cs typeface="Be Vietnam Pro" pitchFamily="34" charset="-120"/>
+                <a:latin typeface="Arial" pitchFamily="34" charset="0"/>
+                <a:ea typeface="Arial" pitchFamily="34" charset="-122"/>
+                <a:cs typeface="Arial" pitchFamily="34" charset="-120"/>
               </a:rPr>
               <a:t>FlyBot · 6</a:t>
             </a:r>
@@ -10106,9 +10434,9 @@
                 <a:solidFill>
                   <a:srgbClr val="F2C230"/>
                 </a:solidFill>
-                <a:latin typeface="Be Vietnam Pro" pitchFamily="34" charset="0"/>
-                <a:ea typeface="Be Vietnam Pro" pitchFamily="34" charset="-122"/>
-                <a:cs typeface="Be Vietnam Pro" pitchFamily="34" charset="-120"/>
+                <a:latin typeface="Arial" pitchFamily="34" charset="0"/>
+                <a:ea typeface="Arial" pitchFamily="34" charset="-122"/>
+                <a:cs typeface="Arial" pitchFamily="34" charset="-120"/>
               </a:rPr>
               <a:t>TWO KINDS OF TRAP</a:t>
             </a:r>
@@ -10152,9 +10480,9 @@
                 <a:solidFill>
                   <a:srgbClr val="F5F7F1"/>
                 </a:solidFill>
-                <a:latin typeface="Be Vietnam Pro" pitchFamily="34" charset="0"/>
-                <a:ea typeface="Be Vietnam Pro" pitchFamily="34" charset="-122"/>
-                <a:cs typeface="Be Vietnam Pro" pitchFamily="34" charset="-120"/>
+                <a:latin typeface="Arial" pitchFamily="34" charset="0"/>
+                <a:ea typeface="Arial" pitchFamily="34" charset="-122"/>
+                <a:cs typeface="Arial" pitchFamily="34" charset="-120"/>
               </a:rPr>
               <a:t>Each kind of trap is read its own way</a:t>
             </a:r>
@@ -10227,9 +10555,9 @@
                 <a:solidFill>
                   <a:srgbClr val="13261D"/>
                 </a:solidFill>
-                <a:latin typeface="Be Vietnam Pro" pitchFamily="34" charset="0"/>
-                <a:ea typeface="Be Vietnam Pro" pitchFamily="34" charset="-122"/>
-                <a:cs typeface="Be Vietnam Pro" pitchFamily="34" charset="-120"/>
+                <a:latin typeface="Arial" pitchFamily="34" charset="0"/>
+                <a:ea typeface="Arial" pitchFamily="34" charset="-122"/>
+                <a:cs typeface="Arial" pitchFamily="34" charset="-120"/>
               </a:rPr>
               <a:t>Sticky trap</a:t>
             </a:r>
@@ -10271,9 +10599,9 @@
                 <a:solidFill>
                   <a:srgbClr val="F5F7F1"/>
                 </a:solidFill>
-                <a:latin typeface="Be Vietnam Pro" pitchFamily="34" charset="0"/>
-                <a:ea typeface="Be Vietnam Pro" pitchFamily="34" charset="-122"/>
-                <a:cs typeface="Be Vietnam Pro" pitchFamily="34" charset="-120"/>
+                <a:latin typeface="Arial" pitchFamily="34" charset="0"/>
+                <a:ea typeface="Arial" pitchFamily="34" charset="-122"/>
+                <a:cs typeface="Arial" pitchFamily="34" charset="-120"/>
               </a:rPr>
               <a:t>Catches = the rise each day</a:t>
             </a:r>
@@ -10315,9 +10643,9 @@
                 <a:solidFill>
                   <a:srgbClr val="BFD3C6"/>
                 </a:solidFill>
-                <a:latin typeface="Be Vietnam Pro" pitchFamily="34" charset="0"/>
-                <a:ea typeface="Be Vietnam Pro" pitchFamily="34" charset="-122"/>
-                <a:cs typeface="Be Vietnam Pro" pitchFamily="34" charset="-120"/>
+                <a:latin typeface="Arial" pitchFamily="34" charset="0"/>
+                <a:ea typeface="Arial" pitchFamily="34" charset="-122"/>
+                <a:cs typeface="Arial" pitchFamily="34" charset="-120"/>
               </a:rPr>
               <a:t>The glue card keeps every insect it caught. FlyBot counts the new ones since yesterday, skips card-change days, and reminds you when a card is due.</a:t>
             </a:r>
@@ -10390,9 +10718,9 @@
                 <a:solidFill>
                   <a:srgbClr val="13261D"/>
                 </a:solidFill>
-                <a:latin typeface="Be Vietnam Pro" pitchFamily="34" charset="0"/>
-                <a:ea typeface="Be Vietnam Pro" pitchFamily="34" charset="-122"/>
-                <a:cs typeface="Be Vietnam Pro" pitchFamily="34" charset="-120"/>
+                <a:latin typeface="Arial" pitchFamily="34" charset="0"/>
+                <a:ea typeface="Arial" pitchFamily="34" charset="-122"/>
+                <a:cs typeface="Arial" pitchFamily="34" charset="-120"/>
               </a:rPr>
               <a:t>Lure trap</a:t>
             </a:r>
@@ -10434,9 +10762,9 @@
                 <a:solidFill>
                   <a:srgbClr val="F5F7F1"/>
                 </a:solidFill>
-                <a:latin typeface="Be Vietnam Pro" pitchFamily="34" charset="0"/>
-                <a:ea typeface="Be Vietnam Pro" pitchFamily="34" charset="-122"/>
-                <a:cs typeface="Be Vietnam Pro" pitchFamily="34" charset="-120"/>
+                <a:latin typeface="Arial" pitchFamily="34" charset="0"/>
+                <a:ea typeface="Arial" pitchFamily="34" charset="-122"/>
+                <a:cs typeface="Arial" pitchFamily="34" charset="-120"/>
               </a:rPr>
               <a:t>Judged by the day's average</a:t>
             </a:r>
@@ -10478,9 +10806,9 @@
                 <a:solidFill>
                   <a:srgbClr val="BFD3C6"/>
                 </a:solidFill>
-                <a:latin typeface="Be Vietnam Pro" pitchFamily="34" charset="0"/>
-                <a:ea typeface="Be Vietnam Pro" pitchFamily="34" charset="-122"/>
-                <a:cs typeface="Be Vietnam Pro" pitchFamily="34" charset="-120"/>
+                <a:latin typeface="Arial" pitchFamily="34" charset="0"/>
+                <a:ea typeface="Arial" pitchFamily="34" charset="-122"/>
+                <a:cs typeface="Arial" pitchFamily="34" charset="-120"/>
               </a:rPr>
               <a:t>Flies come and go, so FlyBot uses the average per photo over the day. One crowded photo no longer raises a false alarm.</a:t>
             </a:r>
@@ -10522,9 +10850,9 @@
                 <a:solidFill>
                   <a:srgbClr val="8FA898"/>
                 </a:solidFill>
-                <a:latin typeface="Be Vietnam Pro" pitchFamily="34" charset="0"/>
-                <a:ea typeface="Be Vietnam Pro" pitchFamily="34" charset="-122"/>
-                <a:cs typeface="Be Vietnam Pro" pitchFamily="34" charset="-120"/>
+                <a:latin typeface="Arial" pitchFamily="34" charset="0"/>
+                <a:ea typeface="Arial" pitchFamily="34" charset="-122"/>
+                <a:cs typeface="Arial" pitchFamily="34" charset="-120"/>
               </a:rPr>
               <a:t>FlyBot · 7</a:t>
             </a:r>
@@ -10598,9 +10926,9 @@
                 <a:solidFill>
                   <a:srgbClr val="1D7A50"/>
                 </a:solidFill>
-                <a:latin typeface="Be Vietnam Pro" pitchFamily="34" charset="0"/>
-                <a:ea typeface="Be Vietnam Pro" pitchFamily="34" charset="-122"/>
-                <a:cs typeface="Be Vietnam Pro" pitchFamily="34" charset="-120"/>
+                <a:latin typeface="Arial" pitchFamily="34" charset="0"/>
+                <a:ea typeface="Arial" pitchFamily="34" charset="-122"/>
+                <a:cs typeface="Arial" pitchFamily="34" charset="-120"/>
               </a:rPr>
               <a:t>CAMERAS</a:t>
             </a:r>
@@ -10644,9 +10972,9 @@
                 <a:solidFill>
                   <a:srgbClr val="13261D"/>
                 </a:solidFill>
-                <a:latin typeface="Be Vietnam Pro" pitchFamily="34" charset="0"/>
-                <a:ea typeface="Be Vietnam Pro" pitchFamily="34" charset="-122"/>
-                <a:cs typeface="Be Vietnam Pro" pitchFamily="34" charset="-120"/>
+                <a:latin typeface="Arial" pitchFamily="34" charset="0"/>
+                <a:ea typeface="Arial" pitchFamily="34" charset="-122"/>
+                <a:cs typeface="Arial" pitchFamily="34" charset="-120"/>
               </a:rPr>
               <a:t>Watch live, play back and maintain traps</a:t>
             </a:r>
@@ -10767,9 +11095,9 @@
                 <a:solidFill>
                   <a:srgbClr val="13261D"/>
                 </a:solidFill>
-                <a:latin typeface="Be Vietnam Pro" pitchFamily="34" charset="0"/>
-                <a:ea typeface="Be Vietnam Pro" pitchFamily="34" charset="-122"/>
-                <a:cs typeface="Be Vietnam Pro" pitchFamily="34" charset="-120"/>
+                <a:latin typeface="Arial" pitchFamily="34" charset="0"/>
+                <a:ea typeface="Arial" pitchFamily="34" charset="-122"/>
+                <a:cs typeface="Arial" pitchFamily="34" charset="-120"/>
               </a:rPr>
               <a:t>Live and snap now</a:t>
             </a:r>
@@ -10811,9 +11139,9 @@
                 <a:solidFill>
                   <a:srgbClr val="4A5A50"/>
                 </a:solidFill>
-                <a:latin typeface="Be Vietnam Pro" pitchFamily="34" charset="0"/>
-                <a:ea typeface="Be Vietnam Pro" pitchFamily="34" charset="-122"/>
-                <a:cs typeface="Be Vietnam Pro" pitchFamily="34" charset="-120"/>
+                <a:latin typeface="Arial" pitchFamily="34" charset="0"/>
+                <a:ea typeface="Arial" pitchFamily="34" charset="-122"/>
+                <a:cs typeface="Arial" pitchFamily="34" charset="-120"/>
               </a:rPr>
               <a:t>Live video from the camera; take and analyze a photo when you need one.</a:t>
             </a:r>
@@ -10855,9 +11183,9 @@
                 <a:solidFill>
                   <a:srgbClr val="13261D"/>
                 </a:solidFill>
-                <a:latin typeface="Be Vietnam Pro" pitchFamily="34" charset="0"/>
-                <a:ea typeface="Be Vietnam Pro" pitchFamily="34" charset="-122"/>
-                <a:cs typeface="Be Vietnam Pro" pitchFamily="34" charset="-120"/>
+                <a:latin typeface="Arial" pitchFamily="34" charset="0"/>
+                <a:ea typeface="Arial" pitchFamily="34" charset="-122"/>
+                <a:cs typeface="Arial" pitchFamily="34" charset="-120"/>
               </a:rPr>
               <a:t>Timeline playback</a:t>
             </a:r>
@@ -10899,9 +11227,9 @@
                 <a:solidFill>
                   <a:srgbClr val="4A5A50"/>
                 </a:solidFill>
-                <a:latin typeface="Be Vietnam Pro" pitchFamily="34" charset="0"/>
-                <a:ea typeface="Be Vietnam Pro" pitchFamily="34" charset="-122"/>
-                <a:cs typeface="Be Vietnam Pro" pitchFamily="34" charset="-120"/>
+                <a:latin typeface="Arial" pitchFamily="34" charset="0"/>
+                <a:ea typeface="Arial" pitchFamily="34" charset="-122"/>
+                <a:cs typeface="Arial" pitchFamily="34" charset="-120"/>
               </a:rPr>
               <a:t>Memory card recordings laid out by hour, day by day.</a:t>
             </a:r>
@@ -10943,9 +11271,9 @@
                 <a:solidFill>
                   <a:srgbClr val="13261D"/>
                 </a:solidFill>
-                <a:latin typeface="Be Vietnam Pro" pitchFamily="34" charset="0"/>
-                <a:ea typeface="Be Vietnam Pro" pitchFamily="34" charset="-122"/>
-                <a:cs typeface="Be Vietnam Pro" pitchFamily="34" charset="-120"/>
+                <a:latin typeface="Arial" pitchFamily="34" charset="0"/>
+                <a:ea typeface="Arial" pitchFamily="34" charset="-122"/>
+                <a:cs typeface="Arial" pitchFamily="34" charset="-120"/>
               </a:rPr>
               <a:t>Trap maintenance</a:t>
             </a:r>
@@ -10987,9 +11315,9 @@
                 <a:solidFill>
                   <a:srgbClr val="4A5A50"/>
                 </a:solidFill>
-                <a:latin typeface="Be Vietnam Pro" pitchFamily="34" charset="0"/>
-                <a:ea typeface="Be Vietnam Pro" pitchFamily="34" charset="-122"/>
-                <a:cs typeface="Be Vietnam Pro" pitchFamily="34" charset="-120"/>
+                <a:latin typeface="Arial" pitchFamily="34" charset="0"/>
+                <a:ea typeface="Arial" pitchFamily="34" charset="-122"/>
+                <a:cs typeface="Arial" pitchFamily="34" charset="-120"/>
               </a:rPr>
               <a:t>Log card changes and get a reminder when one is due.</a:t>
             </a:r>
@@ -11031,9 +11359,9 @@
                 <a:solidFill>
                   <a:srgbClr val="6B7B70"/>
                 </a:solidFill>
-                <a:latin typeface="Be Vietnam Pro" pitchFamily="34" charset="0"/>
-                <a:ea typeface="Be Vietnam Pro" pitchFamily="34" charset="-122"/>
-                <a:cs typeface="Be Vietnam Pro" pitchFamily="34" charset="-120"/>
+                <a:latin typeface="Arial" pitchFamily="34" charset="0"/>
+                <a:ea typeface="Arial" pitchFamily="34" charset="-122"/>
+                <a:cs typeface="Arial" pitchFamily="34" charset="-120"/>
               </a:rPr>
               <a:t>FlyBot · 8</a:t>
             </a:r>
@@ -11107,9 +11435,9 @@
                 <a:solidFill>
                   <a:srgbClr val="1D7A50"/>
                 </a:solidFill>
-                <a:latin typeface="Be Vietnam Pro" pitchFamily="34" charset="0"/>
-                <a:ea typeface="Be Vietnam Pro" pitchFamily="34" charset="-122"/>
-                <a:cs typeface="Be Vietnam Pro" pitchFamily="34" charset="-120"/>
+                <a:latin typeface="Arial" pitchFamily="34" charset="0"/>
+                <a:ea typeface="Arial" pitchFamily="34" charset="-122"/>
+                <a:cs typeface="Arial" pitchFamily="34" charset="-120"/>
               </a:rPr>
               <a:t>ALERTS</a:t>
             </a:r>
@@ -11153,9 +11481,9 @@
                 <a:solidFill>
                   <a:srgbClr val="13261D"/>
                 </a:solidFill>
-                <a:latin typeface="Be Vietnam Pro" pitchFamily="34" charset="0"/>
-                <a:ea typeface="Be Vietnam Pro" pitchFamily="34" charset="-122"/>
-                <a:cs typeface="Be Vietnam Pro" pitchFamily="34" charset="-120"/>
+                <a:latin typeface="Arial" pitchFamily="34" charset="0"/>
+                <a:ea typeface="Arial" pitchFamily="34" charset="-122"/>
+                <a:cs typeface="Arial" pitchFamily="34" charset="-120"/>
               </a:rPr>
               <a:t>Know the moment you need to go out</a:t>
             </a:r>
@@ -11276,9 +11604,9 @@
                 <a:solidFill>
                   <a:srgbClr val="13261D"/>
                 </a:solidFill>
-                <a:latin typeface="Be Vietnam Pro" pitchFamily="34" charset="0"/>
-                <a:ea typeface="Be Vietnam Pro" pitchFamily="34" charset="-122"/>
-                <a:cs typeface="Be Vietnam Pro" pitchFamily="34" charset="-120"/>
+                <a:latin typeface="Arial" pitchFamily="34" charset="0"/>
+                <a:ea typeface="Arial" pitchFamily="34" charset="-122"/>
+                <a:cs typeface="Arial" pitchFamily="34" charset="-120"/>
               </a:rPr>
               <a:t>At the right time</a:t>
             </a:r>
@@ -11320,9 +11648,9 @@
                 <a:solidFill>
                   <a:srgbClr val="4A5A50"/>
                 </a:solidFill>
-                <a:latin typeface="Be Vietnam Pro" pitchFamily="34" charset="0"/>
-                <a:ea typeface="Be Vietnam Pro" pitchFamily="34" charset="-122"/>
-                <a:cs typeface="Be Vietnam Pro" pitchFamily="34" charset="-120"/>
+                <a:latin typeface="Arial" pitchFamily="34" charset="0"/>
+                <a:ea typeface="Arial" pitchFamily="34" charset="-122"/>
+                <a:cs typeface="Arial" pitchFamily="34" charset="-120"/>
               </a:rPr>
               <a:t>Trap threshold reached, sudden surge, camera offline, card due.</a:t>
             </a:r>
@@ -11364,9 +11692,9 @@
                 <a:solidFill>
                   <a:srgbClr val="13261D"/>
                 </a:solidFill>
-                <a:latin typeface="Be Vietnam Pro" pitchFamily="34" charset="0"/>
-                <a:ea typeface="Be Vietnam Pro" pitchFamily="34" charset="-122"/>
-                <a:cs typeface="Be Vietnam Pro" pitchFamily="34" charset="-120"/>
+                <a:latin typeface="Arial" pitchFamily="34" charset="0"/>
+                <a:ea typeface="Arial" pitchFamily="34" charset="-122"/>
+                <a:cs typeface="Arial" pitchFamily="34" charset="-120"/>
               </a:rPr>
               <a:t>On the right channel</a:t>
             </a:r>
@@ -11408,9 +11736,9 @@
                 <a:solidFill>
                   <a:srgbClr val="4A5A50"/>
                 </a:solidFill>
-                <a:latin typeface="Be Vietnam Pro" pitchFamily="34" charset="0"/>
-                <a:ea typeface="Be Vietnam Pro" pitchFamily="34" charset="-122"/>
-                <a:cs typeface="Be Vietnam Pro" pitchFamily="34" charset="-120"/>
+                <a:latin typeface="Arial" pitchFamily="34" charset="0"/>
+                <a:ea typeface="Arial" pitchFamily="34" charset="-122"/>
+                <a:cs typeface="Arial" pitchFamily="34" charset="-120"/>
               </a:rPr>
               <a:t>In the app, push, email, Telegram; a 6:30 morning brief if turned on.</a:t>
             </a:r>
@@ -11452,9 +11780,9 @@
                 <a:solidFill>
                   <a:srgbClr val="13261D"/>
                 </a:solidFill>
-                <a:latin typeface="Be Vietnam Pro" pitchFamily="34" charset="0"/>
-                <a:ea typeface="Be Vietnam Pro" pitchFamily="34" charset="-122"/>
-                <a:cs typeface="Be Vietnam Pro" pitchFamily="34" charset="-120"/>
+                <a:latin typeface="Arial" pitchFamily="34" charset="0"/>
+                <a:ea typeface="Arial" pitchFamily="34" charset="-122"/>
+                <a:cs typeface="Arial" pitchFamily="34" charset="-120"/>
               </a:rPr>
               <a:t>Never noisy</a:t>
             </a:r>
@@ -11496,9 +11824,9 @@
                 <a:solidFill>
                   <a:srgbClr val="4A5A50"/>
                 </a:solidFill>
-                <a:latin typeface="Be Vietnam Pro" pitchFamily="34" charset="0"/>
-                <a:ea typeface="Be Vietnam Pro" pitchFamily="34" charset="-122"/>
-                <a:cs typeface="Be Vietnam Pro" pitchFamily="34" charset="-120"/>
+                <a:latin typeface="Arial" pitchFamily="34" charset="0"/>
+                <a:ea typeface="Arial" pitchFamily="34" charset="-122"/>
+                <a:cs typeface="Arial" pitchFamily="34" charset="-120"/>
               </a:rPr>
               <a:t>Pick the alert types, quiet hours and a cool-down between alerts.</a:t>
             </a:r>
@@ -11540,9 +11868,9 @@
                 <a:solidFill>
                   <a:srgbClr val="6B7B70"/>
                 </a:solidFill>
-                <a:latin typeface="Be Vietnam Pro" pitchFamily="34" charset="0"/>
-                <a:ea typeface="Be Vietnam Pro" pitchFamily="34" charset="-122"/>
-                <a:cs typeface="Be Vietnam Pro" pitchFamily="34" charset="-120"/>
+                <a:latin typeface="Arial" pitchFamily="34" charset="0"/>
+                <a:ea typeface="Arial" pitchFamily="34" charset="-122"/>
+                <a:cs typeface="Arial" pitchFamily="34" charset="-120"/>
               </a:rPr>
               <a:t>FlyBot · 9</a:t>
             </a:r>
@@ -11601,7 +11929,7 @@
     </a:clrScheme>
     <a:fontScheme name="FlyBot – Product overview">
       <a:majorFont>
-        <a:latin typeface="Be Vietnam Pro"/>
+        <a:latin typeface="Arial"/>
         <a:ea typeface=""/>
         <a:cs typeface=""/>
         <a:font script="Jpan" typeface="游ゴシック Light"/>
@@ -11653,7 +11981,7 @@
         <a:font script="Tfng" typeface="Ebrima"/>
       </a:majorFont>
       <a:minorFont>
-        <a:latin typeface="Be Vietnam Pro"/>
+        <a:latin typeface="Arial"/>
         <a:ea typeface=""/>
         <a:cs typeface=""/>
         <a:font script="Jpan" typeface="游ゴシック"/>
